--- a/public/lessons/year-6-maths/spring/week-13/multiply-proper-fractions/teaching-powerpoint-v1.pptx
+++ b/public/lessons/year-6-maths/spring/week-13/multiply-proper-fractions/teaching-powerpoint-v1.pptx
@@ -2,24 +2,24 @@
 <file path=ppt/presentation.xml><?xml version="1.0" encoding="utf-8"?>
 <p:presentation xmlns:p="http://schemas.openxmlformats.org/presentationml/2006/main">
   <p:sldMasterIdLst>
-    <p:sldMasterId xmlns:r="http://schemas.openxmlformats.org/officeDocument/2006/relationships" id="2147483648" r:id="Rcbebf2f9725a47d0"/>
+    <p:sldMasterId xmlns:r="http://schemas.openxmlformats.org/officeDocument/2006/relationships" id="2147483648" r:id="R6a68178a00d24ee1"/>
   </p:sldMasterIdLst>
   <p:notesMasterIdLst>
-    <p:notesMasterId xmlns:r="http://schemas.openxmlformats.org/officeDocument/2006/relationships" r:id="R5302704ced574068"/>
+    <p:notesMasterId xmlns:r="http://schemas.openxmlformats.org/officeDocument/2006/relationships" r:id="R8aa753bb0603482f"/>
   </p:notesMasterIdLst>
   <p:sldIdLst>
-    <p:sldId xmlns:r="http://schemas.openxmlformats.org/officeDocument/2006/relationships" id="256" r:id="Rc3c69f6845c14126"/>
-    <p:sldId xmlns:r="http://schemas.openxmlformats.org/officeDocument/2006/relationships" id="257" r:id="R1ad569c8170a43e5"/>
-    <p:sldId xmlns:r="http://schemas.openxmlformats.org/officeDocument/2006/relationships" id="258" r:id="R166c0fb35bfd44e7"/>
-    <p:sldId xmlns:r="http://schemas.openxmlformats.org/officeDocument/2006/relationships" id="259" r:id="R0607527bff32407c"/>
-    <p:sldId xmlns:r="http://schemas.openxmlformats.org/officeDocument/2006/relationships" id="260" r:id="R0984b6fa5fc04ad5"/>
-    <p:sldId xmlns:r="http://schemas.openxmlformats.org/officeDocument/2006/relationships" id="261" r:id="R50ff25db2dff4ed3"/>
-    <p:sldId xmlns:r="http://schemas.openxmlformats.org/officeDocument/2006/relationships" id="262" r:id="Rfe7e4167c104464c"/>
-    <p:sldId xmlns:r="http://schemas.openxmlformats.org/officeDocument/2006/relationships" id="263" r:id="Rc10f28e6b0db470d"/>
-    <p:sldId xmlns:r="http://schemas.openxmlformats.org/officeDocument/2006/relationships" id="264" r:id="R9d40a9506e2b4caa"/>
-    <p:sldId xmlns:r="http://schemas.openxmlformats.org/officeDocument/2006/relationships" id="265" r:id="Rbbc43c2d228746fb"/>
-    <p:sldId xmlns:r="http://schemas.openxmlformats.org/officeDocument/2006/relationships" id="266" r:id="R329f82c77e4f4cb7"/>
-    <p:sldId xmlns:r="http://schemas.openxmlformats.org/officeDocument/2006/relationships" id="267" r:id="Rbd715ac875664454"/>
+    <p:sldId xmlns:r="http://schemas.openxmlformats.org/officeDocument/2006/relationships" id="256" r:id="R33235d7c56044514"/>
+    <p:sldId xmlns:r="http://schemas.openxmlformats.org/officeDocument/2006/relationships" id="257" r:id="Rd26f54ac098b4386"/>
+    <p:sldId xmlns:r="http://schemas.openxmlformats.org/officeDocument/2006/relationships" id="258" r:id="R584876e279be4a4f"/>
+    <p:sldId xmlns:r="http://schemas.openxmlformats.org/officeDocument/2006/relationships" id="259" r:id="R47c32d4bd1d2415c"/>
+    <p:sldId xmlns:r="http://schemas.openxmlformats.org/officeDocument/2006/relationships" id="260" r:id="R8e0f6dece65642eb"/>
+    <p:sldId xmlns:r="http://schemas.openxmlformats.org/officeDocument/2006/relationships" id="261" r:id="R2cb399d687a74c32"/>
+    <p:sldId xmlns:r="http://schemas.openxmlformats.org/officeDocument/2006/relationships" id="262" r:id="Rbb60083d07114d96"/>
+    <p:sldId xmlns:r="http://schemas.openxmlformats.org/officeDocument/2006/relationships" id="263" r:id="R082e9200a1f8409d"/>
+    <p:sldId xmlns:r="http://schemas.openxmlformats.org/officeDocument/2006/relationships" id="264" r:id="R3e8f1acb438844f5"/>
+    <p:sldId xmlns:r="http://schemas.openxmlformats.org/officeDocument/2006/relationships" id="265" r:id="Rcf723d3db14d4abd"/>
+    <p:sldId xmlns:r="http://schemas.openxmlformats.org/officeDocument/2006/relationships" id="266" r:id="R70a86c7b4b8644e7"/>
+    <p:sldId xmlns:r="http://schemas.openxmlformats.org/officeDocument/2006/relationships" id="267" r:id="Rc45e707c525c429e"/>
   </p:sldIdLst>
   <p:sldSz cx="12192000" cy="6858000"/>
   <p:notesSz cx="6858000" cy="9144000"/>
@@ -873,7 +873,7 @@
           <a:lstStyle xmlns:a="http://schemas.openxmlformats.org/drawingml/2006/main"/>
           <a:p xmlns:a="http://schemas.openxmlformats.org/drawingml/2006/main">
             <a:r>
-              <a:t>I do. Reveal the question, setup and each calculation stage one click at a time. Pupils watch before copying. Model answer: 3/20.</a:t>
+              <a:t>I do. Reveal the question, then reveal each mathematical change one click at a time. Point to the numbers and operation that changed before moving to the next line. Final answer: 3/20.</a:t>
             </a:r>
           </a:p>
         </p:txBody>
@@ -1291,7 +1291,7 @@
   </p:cSld>
   <p:clrMap bg1="lt1" tx1="dk1" bg2="lt2" tx2="dk2" accent1="accent1" accent2="accent2" accent3="accent3" accent4="accent4" accent5="accent5" accent6="accent6" hlink="hlink" folHlink="folHlink"/>
   <p:sldLayoutIdLst>
-    <p:sldLayoutId xmlns:r="http://schemas.openxmlformats.org/officeDocument/2006/relationships" id="2147483649" r:id="Rdbe470c39afc4ecf"/>
+    <p:sldLayoutId xmlns:r="http://schemas.openxmlformats.org/officeDocument/2006/relationships" id="2147483649" r:id="R52edbf573b624cc6"/>
   </p:sldLayoutIdLst>
   <p:txStyles>
     <p:titleStyle>
@@ -1842,7 +1842,7 @@
           <p:cNvPr id="12" name="">
             <a:extLst xmlns:a="http://schemas.openxmlformats.org/drawingml/2006/main">
               <a:ext uri="{FF2B5EF4-FFF2-40B4-BE49-F238E27FC236}">
-                <a16:creationId xmlns:a16="http://schemas.microsoft.com/office/drawing/2014/main" id="{81191515-D715-4FA5-9A23-62DEE92583D9}"/>
+                <a16:creationId xmlns:a16="http://schemas.microsoft.com/office/drawing/2014/main" id="{6E1E593C-BC65-4104-8337-FA8BC612D15A}"/>
               </a:ext>
             </a:extLst>
           </p:cNvPr>
@@ -1874,7 +1874,7 @@
           <p:cNvPr id="2" name="">
             <a:extLst xmlns:a="http://schemas.openxmlformats.org/drawingml/2006/main">
               <a:ext uri="{FF2B5EF4-FFF2-40B4-BE49-F238E27FC236}">
-                <a16:creationId xmlns:a16="http://schemas.microsoft.com/office/drawing/2014/main" id="{736B70C1-1760-403E-9FB0-0D518CA82652}"/>
+                <a16:creationId xmlns:a16="http://schemas.microsoft.com/office/drawing/2014/main" id="{E72A4337-B3C5-4C9D-80F7-63E91D20D300}"/>
               </a:ext>
             </a:extLst>
           </p:cNvPr>
@@ -1931,7 +1931,7 @@
           <p:cNvPr id="3" name="">
             <a:extLst xmlns:a="http://schemas.openxmlformats.org/drawingml/2006/main">
               <a:ext uri="{FF2B5EF4-FFF2-40B4-BE49-F238E27FC236}">
-                <a16:creationId xmlns:a16="http://schemas.microsoft.com/office/drawing/2014/main" id="{C58ECE29-3F20-4171-B63D-97D5A4B160D0}"/>
+                <a16:creationId xmlns:a16="http://schemas.microsoft.com/office/drawing/2014/main" id="{03D5DA1C-B8E7-4860-8C3E-FF68A6FDAB2A}"/>
               </a:ext>
             </a:extLst>
           </p:cNvPr>
@@ -1965,7 +1965,7 @@
           <p:cNvPr id="4" name="">
             <a:extLst xmlns:a="http://schemas.openxmlformats.org/drawingml/2006/main">
               <a:ext uri="{FF2B5EF4-FFF2-40B4-BE49-F238E27FC236}">
-                <a16:creationId xmlns:a16="http://schemas.microsoft.com/office/drawing/2014/main" id="{FF9D6FBC-1625-4993-9CDF-2FB95131520F}"/>
+                <a16:creationId xmlns:a16="http://schemas.microsoft.com/office/drawing/2014/main" id="{5B01D88D-51E8-4751-8A36-9042935D8040}"/>
               </a:ext>
             </a:extLst>
           </p:cNvPr>
@@ -2022,7 +2022,7 @@
           <p:cNvPr id="5" name="">
             <a:extLst xmlns:a="http://schemas.openxmlformats.org/drawingml/2006/main">
               <a:ext uri="{FF2B5EF4-FFF2-40B4-BE49-F238E27FC236}">
-                <a16:creationId xmlns:a16="http://schemas.microsoft.com/office/drawing/2014/main" id="{5FD5BCAE-4C75-4D0E-A54B-AA23864F42BC}"/>
+                <a16:creationId xmlns:a16="http://schemas.microsoft.com/office/drawing/2014/main" id="{C5C6538C-7243-429C-A185-FCA329BC369F}"/>
               </a:ext>
             </a:extLst>
           </p:cNvPr>
@@ -2079,7 +2079,7 @@
           <p:cNvPr id="6" name="">
             <a:extLst xmlns:a="http://schemas.openxmlformats.org/drawingml/2006/main">
               <a:ext uri="{FF2B5EF4-FFF2-40B4-BE49-F238E27FC236}">
-                <a16:creationId xmlns:a16="http://schemas.microsoft.com/office/drawing/2014/main" id="{9BEF5B9E-8634-449C-97EE-6F1EF71E727A}"/>
+                <a16:creationId xmlns:a16="http://schemas.microsoft.com/office/drawing/2014/main" id="{B463ABD0-122D-4E8A-8927-34AD71E9B946}"/>
               </a:ext>
             </a:extLst>
           </p:cNvPr>
@@ -2113,7 +2113,7 @@
           <p:cNvPr id="7" name="">
             <a:extLst xmlns:a="http://schemas.openxmlformats.org/drawingml/2006/main">
               <a:ext uri="{FF2B5EF4-FFF2-40B4-BE49-F238E27FC236}">
-                <a16:creationId xmlns:a16="http://schemas.microsoft.com/office/drawing/2014/main" id="{4C58FABA-6455-4CB7-B99A-46965BDFB17A}"/>
+                <a16:creationId xmlns:a16="http://schemas.microsoft.com/office/drawing/2014/main" id="{A0F610D6-BC43-46F4-B16E-5D6FACE05D8F}"/>
               </a:ext>
             </a:extLst>
           </p:cNvPr>
@@ -2170,7 +2170,7 @@
           <p:cNvPr id="8" name="">
             <a:extLst xmlns:a="http://schemas.openxmlformats.org/drawingml/2006/main">
               <a:ext uri="{FF2B5EF4-FFF2-40B4-BE49-F238E27FC236}">
-                <a16:creationId xmlns:a16="http://schemas.microsoft.com/office/drawing/2014/main" id="{8CB368EC-65E6-4B81-9E49-13A32CF14ACA}"/>
+                <a16:creationId xmlns:a16="http://schemas.microsoft.com/office/drawing/2014/main" id="{0167AF3D-D783-47DB-87A2-9E230E83F23D}"/>
               </a:ext>
             </a:extLst>
           </p:cNvPr>
@@ -2227,7 +2227,7 @@
           <p:cNvPr id="9" name="">
             <a:extLst xmlns:a="http://schemas.openxmlformats.org/drawingml/2006/main">
               <a:ext uri="{FF2B5EF4-FFF2-40B4-BE49-F238E27FC236}">
-                <a16:creationId xmlns:a16="http://schemas.microsoft.com/office/drawing/2014/main" id="{6CD889C3-AAF9-497D-9BBA-BC193B285C6A}"/>
+                <a16:creationId xmlns:a16="http://schemas.microsoft.com/office/drawing/2014/main" id="{98F5D3B5-BE82-455E-A215-B79B5701EB32}"/>
               </a:ext>
             </a:extLst>
           </p:cNvPr>
@@ -2284,7 +2284,7 @@
           <p:cNvPr id="10" name="">
             <a:extLst xmlns:a="http://schemas.openxmlformats.org/drawingml/2006/main">
               <a:ext uri="{FF2B5EF4-FFF2-40B4-BE49-F238E27FC236}">
-                <a16:creationId xmlns:a16="http://schemas.microsoft.com/office/drawing/2014/main" id="{5603D19E-E8CC-4143-BF9F-A181FD797C02}"/>
+                <a16:creationId xmlns:a16="http://schemas.microsoft.com/office/drawing/2014/main" id="{A768F09B-FADF-45E9-A709-F386ED99D723}"/>
               </a:ext>
             </a:extLst>
           </p:cNvPr>
@@ -2341,7 +2341,7 @@
           <p:cNvPr id="11" name="">
             <a:extLst xmlns:a="http://schemas.openxmlformats.org/drawingml/2006/main">
               <a:ext uri="{FF2B5EF4-FFF2-40B4-BE49-F238E27FC236}">
-                <a16:creationId xmlns:a16="http://schemas.microsoft.com/office/drawing/2014/main" id="{DCF302AD-92B2-4834-A26B-FA5FF76B0AA1}"/>
+                <a16:creationId xmlns:a16="http://schemas.microsoft.com/office/drawing/2014/main" id="{EF08E7E7-B01C-43A5-B35C-A18C53CCA71A}"/>
               </a:ext>
             </a:extLst>
           </p:cNvPr>
@@ -2396,7 +2396,7 @@
     </p:spTree>
     <p:extLst>
       <p:ext uri="{BB962C8B-B14F-4D97-AF65-F5344CB8AC3E}">
-        <p14:creationId xmlns:p14="http://schemas.microsoft.com/office/powerpoint/2010/main" val="1287203843"/>
+        <p14:creationId xmlns:p14="http://schemas.microsoft.com/office/powerpoint/2010/main" val="2097857064"/>
       </p:ext>
     </p:extLst>
   </p:cSld>
@@ -2427,7 +2427,7 @@
           <p:cNvPr id="14" name="">
             <a:extLst xmlns:a="http://schemas.openxmlformats.org/drawingml/2006/main">
               <a:ext uri="{FF2B5EF4-FFF2-40B4-BE49-F238E27FC236}">
-                <a16:creationId xmlns:a16="http://schemas.microsoft.com/office/drawing/2014/main" id="{A76087AE-B7B7-41AE-9ECA-DEDC3B258672}"/>
+                <a16:creationId xmlns:a16="http://schemas.microsoft.com/office/drawing/2014/main" id="{59729274-F309-4280-907F-F2D20044763E}"/>
               </a:ext>
             </a:extLst>
           </p:cNvPr>
@@ -2459,7 +2459,7 @@
           <p:cNvPr id="2" name="">
             <a:extLst xmlns:a="http://schemas.openxmlformats.org/drawingml/2006/main">
               <a:ext uri="{FF2B5EF4-FFF2-40B4-BE49-F238E27FC236}">
-                <a16:creationId xmlns:a16="http://schemas.microsoft.com/office/drawing/2014/main" id="{1E8E1979-0D04-4E55-BC14-F000D9F8CE55}"/>
+                <a16:creationId xmlns:a16="http://schemas.microsoft.com/office/drawing/2014/main" id="{7DA5C4C0-E5F4-42A5-8A05-345D2F9CFF12}"/>
               </a:ext>
             </a:extLst>
           </p:cNvPr>
@@ -2516,7 +2516,7 @@
           <p:cNvPr id="3" name="">
             <a:extLst xmlns:a="http://schemas.openxmlformats.org/drawingml/2006/main">
               <a:ext uri="{FF2B5EF4-FFF2-40B4-BE49-F238E27FC236}">
-                <a16:creationId xmlns:a16="http://schemas.microsoft.com/office/drawing/2014/main" id="{2C296AE8-2CAA-4569-ACB9-56C773C8A120}"/>
+                <a16:creationId xmlns:a16="http://schemas.microsoft.com/office/drawing/2014/main" id="{CB90A1E8-648A-43AA-91CE-83BE20600D8B}"/>
               </a:ext>
             </a:extLst>
           </p:cNvPr>
@@ -2548,7 +2548,7 @@
           <p:cNvPr id="4" name="">
             <a:extLst xmlns:a="http://schemas.openxmlformats.org/drawingml/2006/main">
               <a:ext uri="{FF2B5EF4-FFF2-40B4-BE49-F238E27FC236}">
-                <a16:creationId xmlns:a16="http://schemas.microsoft.com/office/drawing/2014/main" id="{C4BCCF4C-7A87-482F-8EF2-EDFC8DDC7621}"/>
+                <a16:creationId xmlns:a16="http://schemas.microsoft.com/office/drawing/2014/main" id="{C0698655-323F-4608-9AC1-DEC09CA6B157}"/>
               </a:ext>
             </a:extLst>
           </p:cNvPr>
@@ -2605,7 +2605,7 @@
           <p:cNvPr id="5" name="">
             <a:extLst xmlns:a="http://schemas.openxmlformats.org/drawingml/2006/main">
               <a:ext uri="{FF2B5EF4-FFF2-40B4-BE49-F238E27FC236}">
-                <a16:creationId xmlns:a16="http://schemas.microsoft.com/office/drawing/2014/main" id="{04C223FA-F34F-4BDE-BDE7-791242120B65}"/>
+                <a16:creationId xmlns:a16="http://schemas.microsoft.com/office/drawing/2014/main" id="{CB9ACE2B-FBFC-4481-855C-0805702C5D16}"/>
               </a:ext>
             </a:extLst>
           </p:cNvPr>
@@ -2662,7 +2662,7 @@
           <p:cNvPr id="6" name="">
             <a:extLst xmlns:a="http://schemas.openxmlformats.org/drawingml/2006/main">
               <a:ext uri="{FF2B5EF4-FFF2-40B4-BE49-F238E27FC236}">
-                <a16:creationId xmlns:a16="http://schemas.microsoft.com/office/drawing/2014/main" id="{4830A8F6-F652-410E-87D3-3F136CA8AED4}"/>
+                <a16:creationId xmlns:a16="http://schemas.microsoft.com/office/drawing/2014/main" id="{9F18C5BD-5D21-4B90-8FF0-6A7496E6E730}"/>
               </a:ext>
             </a:extLst>
           </p:cNvPr>
@@ -2719,7 +2719,7 @@
           <p:cNvPr id="7" name="">
             <a:extLst xmlns:a="http://schemas.openxmlformats.org/drawingml/2006/main">
               <a:ext uri="{FF2B5EF4-FFF2-40B4-BE49-F238E27FC236}">
-                <a16:creationId xmlns:a16="http://schemas.microsoft.com/office/drawing/2014/main" id="{C8EDD4CB-D1E4-446D-B5A4-CE843F8BD52A}"/>
+                <a16:creationId xmlns:a16="http://schemas.microsoft.com/office/drawing/2014/main" id="{6A460BD3-E3CD-4CEA-8826-A688950B5C44}"/>
               </a:ext>
             </a:extLst>
           </p:cNvPr>
@@ -2751,7 +2751,7 @@
           <p:cNvPr id="8" name="">
             <a:extLst xmlns:a="http://schemas.openxmlformats.org/drawingml/2006/main">
               <a:ext uri="{FF2B5EF4-FFF2-40B4-BE49-F238E27FC236}">
-                <a16:creationId xmlns:a16="http://schemas.microsoft.com/office/drawing/2014/main" id="{2DF01897-D91B-44FA-8179-1BBA8E226E04}"/>
+                <a16:creationId xmlns:a16="http://schemas.microsoft.com/office/drawing/2014/main" id="{2D4862FB-041E-4F2D-B10B-43AF44D7F4A3}"/>
               </a:ext>
             </a:extLst>
           </p:cNvPr>
@@ -2808,7 +2808,7 @@
           <p:cNvPr id="9" name="">
             <a:extLst xmlns:a="http://schemas.openxmlformats.org/drawingml/2006/main">
               <a:ext uri="{FF2B5EF4-FFF2-40B4-BE49-F238E27FC236}">
-                <a16:creationId xmlns:a16="http://schemas.microsoft.com/office/drawing/2014/main" id="{5F4CCE23-3E9E-45F3-BB60-A0126C1EB25B}"/>
+                <a16:creationId xmlns:a16="http://schemas.microsoft.com/office/drawing/2014/main" id="{883C374E-C70F-4E6B-84E4-D6DE6AF0E1C0}"/>
               </a:ext>
             </a:extLst>
           </p:cNvPr>
@@ -2865,7 +2865,7 @@
           <p:cNvPr id="10" name="">
             <a:extLst xmlns:a="http://schemas.openxmlformats.org/drawingml/2006/main">
               <a:ext uri="{FF2B5EF4-FFF2-40B4-BE49-F238E27FC236}">
-                <a16:creationId xmlns:a16="http://schemas.microsoft.com/office/drawing/2014/main" id="{050F7BA3-32B4-4853-8B9B-22A64065D554}"/>
+                <a16:creationId xmlns:a16="http://schemas.microsoft.com/office/drawing/2014/main" id="{C9F5CEF8-0C6E-4816-91ED-09354CA99661}"/>
               </a:ext>
             </a:extLst>
           </p:cNvPr>
@@ -2922,7 +2922,7 @@
           <p:cNvPr id="11" name="">
             <a:extLst xmlns:a="http://schemas.openxmlformats.org/drawingml/2006/main">
               <a:ext uri="{FF2B5EF4-FFF2-40B4-BE49-F238E27FC236}">
-                <a16:creationId xmlns:a16="http://schemas.microsoft.com/office/drawing/2014/main" id="{EE90384A-CC9B-492C-8773-522A4B93D6BF}"/>
+                <a16:creationId xmlns:a16="http://schemas.microsoft.com/office/drawing/2014/main" id="{0E7AFC6D-3B8B-4EC5-9EF7-01850C703600}"/>
               </a:ext>
             </a:extLst>
           </p:cNvPr>
@@ -2979,7 +2979,7 @@
           <p:cNvPr id="12" name="">
             <a:extLst xmlns:a="http://schemas.openxmlformats.org/drawingml/2006/main">
               <a:ext uri="{FF2B5EF4-FFF2-40B4-BE49-F238E27FC236}">
-                <a16:creationId xmlns:a16="http://schemas.microsoft.com/office/drawing/2014/main" id="{6A7E16D4-0AD9-481F-B83D-701EEA04A001}"/>
+                <a16:creationId xmlns:a16="http://schemas.microsoft.com/office/drawing/2014/main" id="{F3E46F44-35DA-45BA-891F-39C97C50E09F}"/>
               </a:ext>
             </a:extLst>
           </p:cNvPr>
@@ -3036,7 +3036,7 @@
           <p:cNvPr id="13" name="">
             <a:extLst xmlns:a="http://schemas.openxmlformats.org/drawingml/2006/main">
               <a:ext uri="{FF2B5EF4-FFF2-40B4-BE49-F238E27FC236}">
-                <a16:creationId xmlns:a16="http://schemas.microsoft.com/office/drawing/2014/main" id="{54CF1B29-3AD7-46ED-9AFA-76F919CD53BE}"/>
+                <a16:creationId xmlns:a16="http://schemas.microsoft.com/office/drawing/2014/main" id="{4B7191CC-C04E-4580-97F5-74CA7A957976}"/>
               </a:ext>
             </a:extLst>
           </p:cNvPr>
@@ -3091,7 +3091,7 @@
     </p:spTree>
     <p:extLst>
       <p:ext uri="{BB962C8B-B14F-4D97-AF65-F5344CB8AC3E}">
-        <p14:creationId xmlns:p14="http://schemas.microsoft.com/office/powerpoint/2010/main" val="1008644246"/>
+        <p14:creationId xmlns:p14="http://schemas.microsoft.com/office/powerpoint/2010/main" val="1549391158"/>
       </p:ext>
     </p:extLst>
   </p:cSld>
@@ -3292,7 +3292,7 @@
           <p:cNvPr id="19" name="">
             <a:extLst xmlns:a="http://schemas.openxmlformats.org/drawingml/2006/main">
               <a:ext uri="{FF2B5EF4-FFF2-40B4-BE49-F238E27FC236}">
-                <a16:creationId xmlns:a16="http://schemas.microsoft.com/office/drawing/2014/main" id="{3F8E02FB-764C-4EA7-802A-C3FE20E5F078}"/>
+                <a16:creationId xmlns:a16="http://schemas.microsoft.com/office/drawing/2014/main" id="{478E09DA-7670-47AA-92F1-E020C4941E15}"/>
               </a:ext>
             </a:extLst>
           </p:cNvPr>
@@ -3324,7 +3324,7 @@
           <p:cNvPr id="2" name="">
             <a:extLst xmlns:a="http://schemas.openxmlformats.org/drawingml/2006/main">
               <a:ext uri="{FF2B5EF4-FFF2-40B4-BE49-F238E27FC236}">
-                <a16:creationId xmlns:a16="http://schemas.microsoft.com/office/drawing/2014/main" id="{C2C1927F-4BF3-4766-BB5A-D0D4F7C4D28C}"/>
+                <a16:creationId xmlns:a16="http://schemas.microsoft.com/office/drawing/2014/main" id="{2707B474-E264-4759-A115-54D5F57A83C7}"/>
               </a:ext>
             </a:extLst>
           </p:cNvPr>
@@ -3381,7 +3381,7 @@
           <p:cNvPr id="3" name="">
             <a:extLst xmlns:a="http://schemas.openxmlformats.org/drawingml/2006/main">
               <a:ext uri="{FF2B5EF4-FFF2-40B4-BE49-F238E27FC236}">
-                <a16:creationId xmlns:a16="http://schemas.microsoft.com/office/drawing/2014/main" id="{F9893FBC-3A6A-446C-B139-387844CC32BC}"/>
+                <a16:creationId xmlns:a16="http://schemas.microsoft.com/office/drawing/2014/main" id="{E58470BD-0218-4F69-89C4-C2D1972A25EC}"/>
               </a:ext>
             </a:extLst>
           </p:cNvPr>
@@ -3413,7 +3413,7 @@
           <p:cNvPr id="4" name="">
             <a:extLst xmlns:a="http://schemas.openxmlformats.org/drawingml/2006/main">
               <a:ext uri="{FF2B5EF4-FFF2-40B4-BE49-F238E27FC236}">
-                <a16:creationId xmlns:a16="http://schemas.microsoft.com/office/drawing/2014/main" id="{3CDDB455-BAFF-4D4A-B5F1-96BDD59D9D71}"/>
+                <a16:creationId xmlns:a16="http://schemas.microsoft.com/office/drawing/2014/main" id="{0EA124FF-8282-4218-BC0C-94CD9EB72BE0}"/>
               </a:ext>
             </a:extLst>
           </p:cNvPr>
@@ -3470,7 +3470,7 @@
           <p:cNvPr id="5" name="">
             <a:extLst xmlns:a="http://schemas.openxmlformats.org/drawingml/2006/main">
               <a:ext uri="{FF2B5EF4-FFF2-40B4-BE49-F238E27FC236}">
-                <a16:creationId xmlns:a16="http://schemas.microsoft.com/office/drawing/2014/main" id="{A8882C8B-3504-42D4-858A-0D47E081EEAC}"/>
+                <a16:creationId xmlns:a16="http://schemas.microsoft.com/office/drawing/2014/main" id="{867D359D-8218-43FB-9036-47F346978858}"/>
               </a:ext>
             </a:extLst>
           </p:cNvPr>
@@ -3527,7 +3527,7 @@
           <p:cNvPr id="6" name="">
             <a:extLst xmlns:a="http://schemas.openxmlformats.org/drawingml/2006/main">
               <a:ext uri="{FF2B5EF4-FFF2-40B4-BE49-F238E27FC236}">
-                <a16:creationId xmlns:a16="http://schemas.microsoft.com/office/drawing/2014/main" id="{B7073E03-2E9A-402B-AA6C-90A6EDAD1217}"/>
+                <a16:creationId xmlns:a16="http://schemas.microsoft.com/office/drawing/2014/main" id="{8C73856C-A305-44B3-AC9E-3D4A7BF45391}"/>
               </a:ext>
             </a:extLst>
           </p:cNvPr>
@@ -3584,7 +3584,7 @@
           <p:cNvPr id="7" name="">
             <a:extLst xmlns:a="http://schemas.openxmlformats.org/drawingml/2006/main">
               <a:ext uri="{FF2B5EF4-FFF2-40B4-BE49-F238E27FC236}">
-                <a16:creationId xmlns:a16="http://schemas.microsoft.com/office/drawing/2014/main" id="{CF8FBE71-C57E-4EC9-B2B1-25009AB1B3FF}"/>
+                <a16:creationId xmlns:a16="http://schemas.microsoft.com/office/drawing/2014/main" id="{082925B8-00D1-4399-994C-DD12DA68C470}"/>
               </a:ext>
             </a:extLst>
           </p:cNvPr>
@@ -3616,7 +3616,7 @@
           <p:cNvPr id="8" name="">
             <a:extLst xmlns:a="http://schemas.openxmlformats.org/drawingml/2006/main">
               <a:ext uri="{FF2B5EF4-FFF2-40B4-BE49-F238E27FC236}">
-                <a16:creationId xmlns:a16="http://schemas.microsoft.com/office/drawing/2014/main" id="{DCAC46A9-4730-4702-BA46-492089B0341E}"/>
+                <a16:creationId xmlns:a16="http://schemas.microsoft.com/office/drawing/2014/main" id="{A54AF8FE-958F-4460-AE88-A8DC52B6B8C3}"/>
               </a:ext>
             </a:extLst>
           </p:cNvPr>
@@ -3673,7 +3673,7 @@
           <p:cNvPr id="9" name="">
             <a:extLst xmlns:a="http://schemas.openxmlformats.org/drawingml/2006/main">
               <a:ext uri="{FF2B5EF4-FFF2-40B4-BE49-F238E27FC236}">
-                <a16:creationId xmlns:a16="http://schemas.microsoft.com/office/drawing/2014/main" id="{93013368-1ECA-4605-8486-650296D4FF35}"/>
+                <a16:creationId xmlns:a16="http://schemas.microsoft.com/office/drawing/2014/main" id="{BF6538FA-BDF5-4290-8278-E61E48F34BD4}"/>
               </a:ext>
             </a:extLst>
           </p:cNvPr>
@@ -3730,7 +3730,7 @@
           <p:cNvPr id="10" name="">
             <a:extLst xmlns:a="http://schemas.openxmlformats.org/drawingml/2006/main">
               <a:ext uri="{FF2B5EF4-FFF2-40B4-BE49-F238E27FC236}">
-                <a16:creationId xmlns:a16="http://schemas.microsoft.com/office/drawing/2014/main" id="{173D993B-93F0-4805-92EF-73F238049335}"/>
+                <a16:creationId xmlns:a16="http://schemas.microsoft.com/office/drawing/2014/main" id="{FE5D6404-1F7B-4D39-89DF-8A20662039E3}"/>
               </a:ext>
             </a:extLst>
           </p:cNvPr>
@@ -3787,7 +3787,7 @@
           <p:cNvPr id="11" name="">
             <a:extLst xmlns:a="http://schemas.openxmlformats.org/drawingml/2006/main">
               <a:ext uri="{FF2B5EF4-FFF2-40B4-BE49-F238E27FC236}">
-                <a16:creationId xmlns:a16="http://schemas.microsoft.com/office/drawing/2014/main" id="{732746D2-BF15-4F1F-8FCC-527A966BA9C9}"/>
+                <a16:creationId xmlns:a16="http://schemas.microsoft.com/office/drawing/2014/main" id="{7C09F542-2D04-48B8-AC23-4D307B5C96D9}"/>
               </a:ext>
             </a:extLst>
           </p:cNvPr>
@@ -3821,7 +3821,7 @@
           <p:cNvPr id="12" name="">
             <a:extLst xmlns:a="http://schemas.openxmlformats.org/drawingml/2006/main">
               <a:ext uri="{FF2B5EF4-FFF2-40B4-BE49-F238E27FC236}">
-                <a16:creationId xmlns:a16="http://schemas.microsoft.com/office/drawing/2014/main" id="{9D863922-55C0-4BE9-B6E4-735858C32A59}"/>
+                <a16:creationId xmlns:a16="http://schemas.microsoft.com/office/drawing/2014/main" id="{BCD9FF56-2658-415B-B133-DF124D7191B1}"/>
               </a:ext>
             </a:extLst>
           </p:cNvPr>
@@ -3878,7 +3878,7 @@
           <p:cNvPr id="13" name="">
             <a:extLst xmlns:a="http://schemas.openxmlformats.org/drawingml/2006/main">
               <a:ext uri="{FF2B5EF4-FFF2-40B4-BE49-F238E27FC236}">
-                <a16:creationId xmlns:a16="http://schemas.microsoft.com/office/drawing/2014/main" id="{C585FAA0-5033-4675-9198-690793718B14}"/>
+                <a16:creationId xmlns:a16="http://schemas.microsoft.com/office/drawing/2014/main" id="{63351591-EEB2-478E-9A7E-525460BE950C}"/>
               </a:ext>
             </a:extLst>
           </p:cNvPr>
@@ -3935,7 +3935,7 @@
           <p:cNvPr id="14" name="">
             <a:extLst xmlns:a="http://schemas.openxmlformats.org/drawingml/2006/main">
               <a:ext uri="{FF2B5EF4-FFF2-40B4-BE49-F238E27FC236}">
-                <a16:creationId xmlns:a16="http://schemas.microsoft.com/office/drawing/2014/main" id="{F513A7D6-A160-4366-9E24-8CED1E339CA8}"/>
+                <a16:creationId xmlns:a16="http://schemas.microsoft.com/office/drawing/2014/main" id="{E647D007-C306-4220-881A-EFA435E886A7}"/>
               </a:ext>
             </a:extLst>
           </p:cNvPr>
@@ -3992,7 +3992,7 @@
           <p:cNvPr id="15" name="">
             <a:extLst xmlns:a="http://schemas.openxmlformats.org/drawingml/2006/main">
               <a:ext uri="{FF2B5EF4-FFF2-40B4-BE49-F238E27FC236}">
-                <a16:creationId xmlns:a16="http://schemas.microsoft.com/office/drawing/2014/main" id="{4CCF6E77-5AA6-4355-870E-EA0B7A62DDCC}"/>
+                <a16:creationId xmlns:a16="http://schemas.microsoft.com/office/drawing/2014/main" id="{4D49B163-25E5-4EB8-933B-FD4A0DC66905}"/>
               </a:ext>
             </a:extLst>
           </p:cNvPr>
@@ -4026,7 +4026,7 @@
           <p:cNvPr id="16" name="">
             <a:extLst xmlns:a="http://schemas.openxmlformats.org/drawingml/2006/main">
               <a:ext uri="{FF2B5EF4-FFF2-40B4-BE49-F238E27FC236}">
-                <a16:creationId xmlns:a16="http://schemas.microsoft.com/office/drawing/2014/main" id="{70311C9C-2260-469C-8B88-FF44334E0014}"/>
+                <a16:creationId xmlns:a16="http://schemas.microsoft.com/office/drawing/2014/main" id="{ADE4F2A4-1EE7-4DE4-A73F-77164339F7C7}"/>
               </a:ext>
             </a:extLst>
           </p:cNvPr>
@@ -4083,7 +4083,7 @@
           <p:cNvPr id="17" name="">
             <a:extLst xmlns:a="http://schemas.openxmlformats.org/drawingml/2006/main">
               <a:ext uri="{FF2B5EF4-FFF2-40B4-BE49-F238E27FC236}">
-                <a16:creationId xmlns:a16="http://schemas.microsoft.com/office/drawing/2014/main" id="{B212FAC4-9C04-45C3-A9F2-47C5797ABB43}"/>
+                <a16:creationId xmlns:a16="http://schemas.microsoft.com/office/drawing/2014/main" id="{C6882DEF-28D4-4937-8F13-0C180BCD577C}"/>
               </a:ext>
             </a:extLst>
           </p:cNvPr>
@@ -4140,7 +4140,7 @@
           <p:cNvPr id="18" name="">
             <a:extLst xmlns:a="http://schemas.openxmlformats.org/drawingml/2006/main">
               <a:ext uri="{FF2B5EF4-FFF2-40B4-BE49-F238E27FC236}">
-                <a16:creationId xmlns:a16="http://schemas.microsoft.com/office/drawing/2014/main" id="{1AE23EAE-2F5C-4AC4-AA2A-4627B2F1A1FC}"/>
+                <a16:creationId xmlns:a16="http://schemas.microsoft.com/office/drawing/2014/main" id="{E2E1095F-A79B-48B9-B3ED-60016FC0A852}"/>
               </a:ext>
             </a:extLst>
           </p:cNvPr>
@@ -4195,7 +4195,7 @@
     </p:spTree>
     <p:extLst>
       <p:ext uri="{BB962C8B-B14F-4D97-AF65-F5344CB8AC3E}">
-        <p14:creationId xmlns:p14="http://schemas.microsoft.com/office/powerpoint/2010/main" val="2066901476"/>
+        <p14:creationId xmlns:p14="http://schemas.microsoft.com/office/powerpoint/2010/main" val="459400734"/>
       </p:ext>
     </p:extLst>
   </p:cSld>
@@ -4350,7 +4350,7 @@
           <p:cNvPr id="23" name="">
             <a:extLst xmlns:a="http://schemas.openxmlformats.org/drawingml/2006/main">
               <a:ext uri="{FF2B5EF4-FFF2-40B4-BE49-F238E27FC236}">
-                <a16:creationId xmlns:a16="http://schemas.microsoft.com/office/drawing/2014/main" id="{444C94A0-0DCB-40EC-AEFF-FA481DF47F66}"/>
+                <a16:creationId xmlns:a16="http://schemas.microsoft.com/office/drawing/2014/main" id="{78EDAB1F-4791-4F8E-AA6E-E77E98408786}"/>
               </a:ext>
             </a:extLst>
           </p:cNvPr>
@@ -4382,7 +4382,7 @@
           <p:cNvPr id="2" name="">
             <a:extLst xmlns:a="http://schemas.openxmlformats.org/drawingml/2006/main">
               <a:ext uri="{FF2B5EF4-FFF2-40B4-BE49-F238E27FC236}">
-                <a16:creationId xmlns:a16="http://schemas.microsoft.com/office/drawing/2014/main" id="{5A4B48FD-5C65-467E-9947-85CD799D7AF1}"/>
+                <a16:creationId xmlns:a16="http://schemas.microsoft.com/office/drawing/2014/main" id="{B398B9BF-6779-443C-B463-658299339272}"/>
               </a:ext>
             </a:extLst>
           </p:cNvPr>
@@ -4439,7 +4439,7 @@
           <p:cNvPr id="3" name="">
             <a:extLst xmlns:a="http://schemas.openxmlformats.org/drawingml/2006/main">
               <a:ext uri="{FF2B5EF4-FFF2-40B4-BE49-F238E27FC236}">
-                <a16:creationId xmlns:a16="http://schemas.microsoft.com/office/drawing/2014/main" id="{754FA60F-123B-4A43-8999-0CCAEF49DA00}"/>
+                <a16:creationId xmlns:a16="http://schemas.microsoft.com/office/drawing/2014/main" id="{4E3A3E45-B677-400B-BFA0-9D8D20A56C16}"/>
               </a:ext>
             </a:extLst>
           </p:cNvPr>
@@ -4471,7 +4471,7 @@
           <p:cNvPr id="4" name="">
             <a:extLst xmlns:a="http://schemas.openxmlformats.org/drawingml/2006/main">
               <a:ext uri="{FF2B5EF4-FFF2-40B4-BE49-F238E27FC236}">
-                <a16:creationId xmlns:a16="http://schemas.microsoft.com/office/drawing/2014/main" id="{C0DB7903-D6BA-4CA1-ABC1-CF2EDE1D4269}"/>
+                <a16:creationId xmlns:a16="http://schemas.microsoft.com/office/drawing/2014/main" id="{24B051E8-541E-4D7E-95DD-25B4FDC45A73}"/>
               </a:ext>
             </a:extLst>
           </p:cNvPr>
@@ -4528,7 +4528,7 @@
           <p:cNvPr id="5" name="">
             <a:extLst xmlns:a="http://schemas.openxmlformats.org/drawingml/2006/main">
               <a:ext uri="{FF2B5EF4-FFF2-40B4-BE49-F238E27FC236}">
-                <a16:creationId xmlns:a16="http://schemas.microsoft.com/office/drawing/2014/main" id="{C74036C2-439A-495F-8E57-4C7ED2786C10}"/>
+                <a16:creationId xmlns:a16="http://schemas.microsoft.com/office/drawing/2014/main" id="{8E301F4A-0301-4D27-B88D-E40A21A96492}"/>
               </a:ext>
             </a:extLst>
           </p:cNvPr>
@@ -4585,7 +4585,7 @@
           <p:cNvPr id="6" name="">
             <a:extLst xmlns:a="http://schemas.openxmlformats.org/drawingml/2006/main">
               <a:ext uri="{FF2B5EF4-FFF2-40B4-BE49-F238E27FC236}">
-                <a16:creationId xmlns:a16="http://schemas.microsoft.com/office/drawing/2014/main" id="{D50D690A-0367-46D9-97F2-213D236674F0}"/>
+                <a16:creationId xmlns:a16="http://schemas.microsoft.com/office/drawing/2014/main" id="{10938CA8-FFDE-4F05-84E6-509296F8F3CB}"/>
               </a:ext>
             </a:extLst>
           </p:cNvPr>
@@ -4642,7 +4642,7 @@
           <p:cNvPr id="7" name="">
             <a:extLst xmlns:a="http://schemas.openxmlformats.org/drawingml/2006/main">
               <a:ext uri="{FF2B5EF4-FFF2-40B4-BE49-F238E27FC236}">
-                <a16:creationId xmlns:a16="http://schemas.microsoft.com/office/drawing/2014/main" id="{62915FD3-FB0A-405E-8906-8C53EEB7DE90}"/>
+                <a16:creationId xmlns:a16="http://schemas.microsoft.com/office/drawing/2014/main" id="{9D302F63-DC21-465C-90F8-0972D2BBCBEA}"/>
               </a:ext>
             </a:extLst>
           </p:cNvPr>
@@ -4674,7 +4674,7 @@
           <p:cNvPr id="8" name="">
             <a:extLst xmlns:a="http://schemas.openxmlformats.org/drawingml/2006/main">
               <a:ext uri="{FF2B5EF4-FFF2-40B4-BE49-F238E27FC236}">
-                <a16:creationId xmlns:a16="http://schemas.microsoft.com/office/drawing/2014/main" id="{2053B606-6B13-4718-8BE6-3AD8C8FEC550}"/>
+                <a16:creationId xmlns:a16="http://schemas.microsoft.com/office/drawing/2014/main" id="{E0F81D83-4793-46B7-9D99-BE9D8A34B30A}"/>
               </a:ext>
             </a:extLst>
           </p:cNvPr>
@@ -4731,7 +4731,7 @@
           <p:cNvPr id="9" name="">
             <a:extLst xmlns:a="http://schemas.openxmlformats.org/drawingml/2006/main">
               <a:ext uri="{FF2B5EF4-FFF2-40B4-BE49-F238E27FC236}">
-                <a16:creationId xmlns:a16="http://schemas.microsoft.com/office/drawing/2014/main" id="{B6B9D6C5-B0B3-452B-928F-F12CA5D8E98D}"/>
+                <a16:creationId xmlns:a16="http://schemas.microsoft.com/office/drawing/2014/main" id="{984EB906-74DE-4BB8-8E95-191D8B2E342F}"/>
               </a:ext>
             </a:extLst>
           </p:cNvPr>
@@ -4788,7 +4788,7 @@
           <p:cNvPr id="10" name="">
             <a:extLst xmlns:a="http://schemas.openxmlformats.org/drawingml/2006/main">
               <a:ext uri="{FF2B5EF4-FFF2-40B4-BE49-F238E27FC236}">
-                <a16:creationId xmlns:a16="http://schemas.microsoft.com/office/drawing/2014/main" id="{A18FA7A3-2850-412C-8E41-305D9AF2475A}"/>
+                <a16:creationId xmlns:a16="http://schemas.microsoft.com/office/drawing/2014/main" id="{D0FD2B64-4E5F-4E81-B8AB-9692745B3472}"/>
               </a:ext>
             </a:extLst>
           </p:cNvPr>
@@ -4822,7 +4822,7 @@
           <p:cNvPr id="11" name="">
             <a:extLst xmlns:a="http://schemas.openxmlformats.org/drawingml/2006/main">
               <a:ext uri="{FF2B5EF4-FFF2-40B4-BE49-F238E27FC236}">
-                <a16:creationId xmlns:a16="http://schemas.microsoft.com/office/drawing/2014/main" id="{45741F6C-611C-4725-A9FA-009B18335C26}"/>
+                <a16:creationId xmlns:a16="http://schemas.microsoft.com/office/drawing/2014/main" id="{608AE905-CED6-462C-A3CC-D545016B2594}"/>
               </a:ext>
             </a:extLst>
           </p:cNvPr>
@@ -4854,7 +4854,7 @@
           <p:cNvPr id="12" name="">
             <a:extLst xmlns:a="http://schemas.openxmlformats.org/drawingml/2006/main">
               <a:ext uri="{FF2B5EF4-FFF2-40B4-BE49-F238E27FC236}">
-                <a16:creationId xmlns:a16="http://schemas.microsoft.com/office/drawing/2014/main" id="{91033DB9-19E9-450A-8F12-2F1A132F55F7}"/>
+                <a16:creationId xmlns:a16="http://schemas.microsoft.com/office/drawing/2014/main" id="{5542CF26-2034-4363-A93E-0ED5B880A1D1}"/>
               </a:ext>
             </a:extLst>
           </p:cNvPr>
@@ -4911,7 +4911,7 @@
           <p:cNvPr id="13" name="">
             <a:extLst xmlns:a="http://schemas.openxmlformats.org/drawingml/2006/main">
               <a:ext uri="{FF2B5EF4-FFF2-40B4-BE49-F238E27FC236}">
-                <a16:creationId xmlns:a16="http://schemas.microsoft.com/office/drawing/2014/main" id="{122FF2C2-C82D-433A-8685-43D274131F06}"/>
+                <a16:creationId xmlns:a16="http://schemas.microsoft.com/office/drawing/2014/main" id="{165B74E3-6756-4492-AC0C-96857366A3A1}"/>
               </a:ext>
             </a:extLst>
           </p:cNvPr>
@@ -4968,7 +4968,7 @@
           <p:cNvPr id="14" name="">
             <a:extLst xmlns:a="http://schemas.openxmlformats.org/drawingml/2006/main">
               <a:ext uri="{FF2B5EF4-FFF2-40B4-BE49-F238E27FC236}">
-                <a16:creationId xmlns:a16="http://schemas.microsoft.com/office/drawing/2014/main" id="{B3B0B9F6-C3B7-4795-97C7-721EAD86F1F0}"/>
+                <a16:creationId xmlns:a16="http://schemas.microsoft.com/office/drawing/2014/main" id="{AB78DD84-955D-402A-B694-163A8CACB048}"/>
               </a:ext>
             </a:extLst>
           </p:cNvPr>
@@ -5002,7 +5002,7 @@
           <p:cNvPr id="15" name="">
             <a:extLst xmlns:a="http://schemas.openxmlformats.org/drawingml/2006/main">
               <a:ext uri="{FF2B5EF4-FFF2-40B4-BE49-F238E27FC236}">
-                <a16:creationId xmlns:a16="http://schemas.microsoft.com/office/drawing/2014/main" id="{0D821499-9574-446C-9D46-8D550C5DA5FE}"/>
+                <a16:creationId xmlns:a16="http://schemas.microsoft.com/office/drawing/2014/main" id="{6958A63B-3B56-446E-8745-C8CA90382831}"/>
               </a:ext>
             </a:extLst>
           </p:cNvPr>
@@ -5034,7 +5034,7 @@
           <p:cNvPr id="16" name="">
             <a:extLst xmlns:a="http://schemas.openxmlformats.org/drawingml/2006/main">
               <a:ext uri="{FF2B5EF4-FFF2-40B4-BE49-F238E27FC236}">
-                <a16:creationId xmlns:a16="http://schemas.microsoft.com/office/drawing/2014/main" id="{AC4E6DC4-2040-4B73-90CE-C8A8192A93E8}"/>
+                <a16:creationId xmlns:a16="http://schemas.microsoft.com/office/drawing/2014/main" id="{5455FAB7-3D5A-4156-80C0-E291438CBBB1}"/>
               </a:ext>
             </a:extLst>
           </p:cNvPr>
@@ -5091,7 +5091,7 @@
           <p:cNvPr id="17" name="">
             <a:extLst xmlns:a="http://schemas.openxmlformats.org/drawingml/2006/main">
               <a:ext uri="{FF2B5EF4-FFF2-40B4-BE49-F238E27FC236}">
-                <a16:creationId xmlns:a16="http://schemas.microsoft.com/office/drawing/2014/main" id="{9690E774-459D-4D6A-BA3D-2525F898D4B3}"/>
+                <a16:creationId xmlns:a16="http://schemas.microsoft.com/office/drawing/2014/main" id="{792C3290-84D3-42A1-B919-53A96D630030}"/>
               </a:ext>
             </a:extLst>
           </p:cNvPr>
@@ -5148,7 +5148,7 @@
           <p:cNvPr id="18" name="">
             <a:extLst xmlns:a="http://schemas.openxmlformats.org/drawingml/2006/main">
               <a:ext uri="{FF2B5EF4-FFF2-40B4-BE49-F238E27FC236}">
-                <a16:creationId xmlns:a16="http://schemas.microsoft.com/office/drawing/2014/main" id="{2347483F-4ABB-4C36-A5BE-3F4F696C44BF}"/>
+                <a16:creationId xmlns:a16="http://schemas.microsoft.com/office/drawing/2014/main" id="{F8A3DB31-4B9E-465B-BD7D-0B5EE6D5D5E9}"/>
               </a:ext>
             </a:extLst>
           </p:cNvPr>
@@ -5182,7 +5182,7 @@
           <p:cNvPr id="19" name="">
             <a:extLst xmlns:a="http://schemas.openxmlformats.org/drawingml/2006/main">
               <a:ext uri="{FF2B5EF4-FFF2-40B4-BE49-F238E27FC236}">
-                <a16:creationId xmlns:a16="http://schemas.microsoft.com/office/drawing/2014/main" id="{5B042A41-6C6A-430A-B1E1-82A29C2C3C27}"/>
+                <a16:creationId xmlns:a16="http://schemas.microsoft.com/office/drawing/2014/main" id="{3EA51A9A-6989-47FF-8A04-EDFB2C7B4699}"/>
               </a:ext>
             </a:extLst>
           </p:cNvPr>
@@ -5214,7 +5214,7 @@
           <p:cNvPr id="20" name="">
             <a:extLst xmlns:a="http://schemas.openxmlformats.org/drawingml/2006/main">
               <a:ext uri="{FF2B5EF4-FFF2-40B4-BE49-F238E27FC236}">
-                <a16:creationId xmlns:a16="http://schemas.microsoft.com/office/drawing/2014/main" id="{206AA65A-03CB-4DFB-842F-326D598068AD}"/>
+                <a16:creationId xmlns:a16="http://schemas.microsoft.com/office/drawing/2014/main" id="{206F9505-7263-4A49-809D-54F7EBEE058B}"/>
               </a:ext>
             </a:extLst>
           </p:cNvPr>
@@ -5271,7 +5271,7 @@
           <p:cNvPr id="21" name="">
             <a:extLst xmlns:a="http://schemas.openxmlformats.org/drawingml/2006/main">
               <a:ext uri="{FF2B5EF4-FFF2-40B4-BE49-F238E27FC236}">
-                <a16:creationId xmlns:a16="http://schemas.microsoft.com/office/drawing/2014/main" id="{8A3F459C-2B21-4A2A-AAFF-B805A081EA96}"/>
+                <a16:creationId xmlns:a16="http://schemas.microsoft.com/office/drawing/2014/main" id="{D5736463-616B-43D4-ABFF-F5A7B685D45F}"/>
               </a:ext>
             </a:extLst>
           </p:cNvPr>
@@ -5328,7 +5328,7 @@
           <p:cNvPr id="22" name="">
             <a:extLst xmlns:a="http://schemas.openxmlformats.org/drawingml/2006/main">
               <a:ext uri="{FF2B5EF4-FFF2-40B4-BE49-F238E27FC236}">
-                <a16:creationId xmlns:a16="http://schemas.microsoft.com/office/drawing/2014/main" id="{E55161A5-FB06-46BA-BBEE-DD34C567F3FC}"/>
+                <a16:creationId xmlns:a16="http://schemas.microsoft.com/office/drawing/2014/main" id="{30BB14DD-2D21-4422-A748-84030DC0291F}"/>
               </a:ext>
             </a:extLst>
           </p:cNvPr>
@@ -5383,7 +5383,7 @@
     </p:spTree>
     <p:extLst>
       <p:ext uri="{BB962C8B-B14F-4D97-AF65-F5344CB8AC3E}">
-        <p14:creationId xmlns:p14="http://schemas.microsoft.com/office/powerpoint/2010/main" val="1280702093"/>
+        <p14:creationId xmlns:p14="http://schemas.microsoft.com/office/powerpoint/2010/main" val="397954591"/>
       </p:ext>
     </p:extLst>
   </p:cSld>
@@ -5584,7 +5584,7 @@
           <p:cNvPr id="23" name="">
             <a:extLst xmlns:a="http://schemas.openxmlformats.org/drawingml/2006/main">
               <a:ext uri="{FF2B5EF4-FFF2-40B4-BE49-F238E27FC236}">
-                <a16:creationId xmlns:a16="http://schemas.microsoft.com/office/drawing/2014/main" id="{20555E67-C726-4394-AA02-CADD906F39BA}"/>
+                <a16:creationId xmlns:a16="http://schemas.microsoft.com/office/drawing/2014/main" id="{B4C04EDB-F5C2-4818-BB41-A4209185FF0C}"/>
               </a:ext>
             </a:extLst>
           </p:cNvPr>
@@ -5616,7 +5616,7 @@
           <p:cNvPr id="2" name="">
             <a:extLst xmlns:a="http://schemas.openxmlformats.org/drawingml/2006/main">
               <a:ext uri="{FF2B5EF4-FFF2-40B4-BE49-F238E27FC236}">
-                <a16:creationId xmlns:a16="http://schemas.microsoft.com/office/drawing/2014/main" id="{F128D359-5325-45A2-A19F-AE877DDCE2D5}"/>
+                <a16:creationId xmlns:a16="http://schemas.microsoft.com/office/drawing/2014/main" id="{7C6E40AF-C57E-471F-B165-888C54F7445E}"/>
               </a:ext>
             </a:extLst>
           </p:cNvPr>
@@ -5673,7 +5673,7 @@
           <p:cNvPr id="3" name="">
             <a:extLst xmlns:a="http://schemas.openxmlformats.org/drawingml/2006/main">
               <a:ext uri="{FF2B5EF4-FFF2-40B4-BE49-F238E27FC236}">
-                <a16:creationId xmlns:a16="http://schemas.microsoft.com/office/drawing/2014/main" id="{CFDCDBD5-1E8C-4ED6-8212-E79D230CA1B0}"/>
+                <a16:creationId xmlns:a16="http://schemas.microsoft.com/office/drawing/2014/main" id="{323E5E8A-76C4-4885-A230-A59148FD1F7F}"/>
               </a:ext>
             </a:extLst>
           </p:cNvPr>
@@ -5705,7 +5705,7 @@
           <p:cNvPr id="4" name="">
             <a:extLst xmlns:a="http://schemas.openxmlformats.org/drawingml/2006/main">
               <a:ext uri="{FF2B5EF4-FFF2-40B4-BE49-F238E27FC236}">
-                <a16:creationId xmlns:a16="http://schemas.microsoft.com/office/drawing/2014/main" id="{90F6B5C0-7242-43DE-AFF1-A51CA88D4757}"/>
+                <a16:creationId xmlns:a16="http://schemas.microsoft.com/office/drawing/2014/main" id="{19EFA471-30EE-4A9E-B82E-50CC02214FDB}"/>
               </a:ext>
             </a:extLst>
           </p:cNvPr>
@@ -5762,7 +5762,7 @@
           <p:cNvPr id="5" name="">
             <a:extLst xmlns:a="http://schemas.openxmlformats.org/drawingml/2006/main">
               <a:ext uri="{FF2B5EF4-FFF2-40B4-BE49-F238E27FC236}">
-                <a16:creationId xmlns:a16="http://schemas.microsoft.com/office/drawing/2014/main" id="{08B5B093-44B8-4E71-BE51-C5B522BD45D4}"/>
+                <a16:creationId xmlns:a16="http://schemas.microsoft.com/office/drawing/2014/main" id="{9EC9BFE0-592E-476A-9549-E04E636AA36D}"/>
               </a:ext>
             </a:extLst>
           </p:cNvPr>
@@ -5819,7 +5819,7 @@
           <p:cNvPr id="6" name="">
             <a:extLst xmlns:a="http://schemas.openxmlformats.org/drawingml/2006/main">
               <a:ext uri="{FF2B5EF4-FFF2-40B4-BE49-F238E27FC236}">
-                <a16:creationId xmlns:a16="http://schemas.microsoft.com/office/drawing/2014/main" id="{BFA08F75-29ED-4CF6-83D6-D32447CEA604}"/>
+                <a16:creationId xmlns:a16="http://schemas.microsoft.com/office/drawing/2014/main" id="{7A7B0A36-471B-48D4-A94B-B8BA5122F8D6}"/>
               </a:ext>
             </a:extLst>
           </p:cNvPr>
@@ -5876,7 +5876,7 @@
           <p:cNvPr id="7" name="">
             <a:extLst xmlns:a="http://schemas.openxmlformats.org/drawingml/2006/main">
               <a:ext uri="{FF2B5EF4-FFF2-40B4-BE49-F238E27FC236}">
-                <a16:creationId xmlns:a16="http://schemas.microsoft.com/office/drawing/2014/main" id="{654B318E-170A-4C84-B9FC-A3E6B0E84591}"/>
+                <a16:creationId xmlns:a16="http://schemas.microsoft.com/office/drawing/2014/main" id="{B095019C-0827-4B9B-B9AA-1C1B6C7BA647}"/>
               </a:ext>
             </a:extLst>
           </p:cNvPr>
@@ -5908,7 +5908,7 @@
           <p:cNvPr id="8" name="">
             <a:extLst xmlns:a="http://schemas.openxmlformats.org/drawingml/2006/main">
               <a:ext uri="{FF2B5EF4-FFF2-40B4-BE49-F238E27FC236}">
-                <a16:creationId xmlns:a16="http://schemas.microsoft.com/office/drawing/2014/main" id="{354958C8-CE46-43CA-973C-B6E05838F7D8}"/>
+                <a16:creationId xmlns:a16="http://schemas.microsoft.com/office/drawing/2014/main" id="{6823969D-56E5-4B56-8CCE-54314084ECAF}"/>
               </a:ext>
             </a:extLst>
           </p:cNvPr>
@@ -5965,7 +5965,7 @@
           <p:cNvPr id="9" name="">
             <a:extLst xmlns:a="http://schemas.openxmlformats.org/drawingml/2006/main">
               <a:ext uri="{FF2B5EF4-FFF2-40B4-BE49-F238E27FC236}">
-                <a16:creationId xmlns:a16="http://schemas.microsoft.com/office/drawing/2014/main" id="{F2EA2150-F069-4FDD-9119-3105483304EB}"/>
+                <a16:creationId xmlns:a16="http://schemas.microsoft.com/office/drawing/2014/main" id="{AE7C8B7A-10D6-4268-B06A-E54296654D98}"/>
               </a:ext>
             </a:extLst>
           </p:cNvPr>
@@ -6022,7 +6022,7 @@
           <p:cNvPr id="10" name="">
             <a:extLst xmlns:a="http://schemas.openxmlformats.org/drawingml/2006/main">
               <a:ext uri="{FF2B5EF4-FFF2-40B4-BE49-F238E27FC236}">
-                <a16:creationId xmlns:a16="http://schemas.microsoft.com/office/drawing/2014/main" id="{8E80C5B6-E1F3-4D70-A7F0-BFACFD53AD7C}"/>
+                <a16:creationId xmlns:a16="http://schemas.microsoft.com/office/drawing/2014/main" id="{38D7D67D-DBE8-41AB-9758-583D5E3B11CD}"/>
               </a:ext>
             </a:extLst>
           </p:cNvPr>
@@ -6056,7 +6056,7 @@
           <p:cNvPr id="11" name="">
             <a:extLst xmlns:a="http://schemas.openxmlformats.org/drawingml/2006/main">
               <a:ext uri="{FF2B5EF4-FFF2-40B4-BE49-F238E27FC236}">
-                <a16:creationId xmlns:a16="http://schemas.microsoft.com/office/drawing/2014/main" id="{F1539F15-CCE6-403A-B8AA-95A032A9D9FD}"/>
+                <a16:creationId xmlns:a16="http://schemas.microsoft.com/office/drawing/2014/main" id="{957BA0D0-CA00-46F6-A8C8-83AE7CD303E0}"/>
               </a:ext>
             </a:extLst>
           </p:cNvPr>
@@ -6088,7 +6088,7 @@
           <p:cNvPr id="12" name="">
             <a:extLst xmlns:a="http://schemas.openxmlformats.org/drawingml/2006/main">
               <a:ext uri="{FF2B5EF4-FFF2-40B4-BE49-F238E27FC236}">
-                <a16:creationId xmlns:a16="http://schemas.microsoft.com/office/drawing/2014/main" id="{C0A4B7CF-7A1A-49A1-B104-B37DB01DB1C6}"/>
+                <a16:creationId xmlns:a16="http://schemas.microsoft.com/office/drawing/2014/main" id="{C01A11F4-0BB3-4243-86AF-DAFC35735851}"/>
               </a:ext>
             </a:extLst>
           </p:cNvPr>
@@ -6145,7 +6145,7 @@
           <p:cNvPr id="13" name="">
             <a:extLst xmlns:a="http://schemas.openxmlformats.org/drawingml/2006/main">
               <a:ext uri="{FF2B5EF4-FFF2-40B4-BE49-F238E27FC236}">
-                <a16:creationId xmlns:a16="http://schemas.microsoft.com/office/drawing/2014/main" id="{F9F2AB61-E90D-418D-9A46-B0DBEDF902A6}"/>
+                <a16:creationId xmlns:a16="http://schemas.microsoft.com/office/drawing/2014/main" id="{9CCFAA53-3B78-4BC0-A837-0180FB1A1F75}"/>
               </a:ext>
             </a:extLst>
           </p:cNvPr>
@@ -6202,7 +6202,7 @@
           <p:cNvPr id="14" name="">
             <a:extLst xmlns:a="http://schemas.openxmlformats.org/drawingml/2006/main">
               <a:ext uri="{FF2B5EF4-FFF2-40B4-BE49-F238E27FC236}">
-                <a16:creationId xmlns:a16="http://schemas.microsoft.com/office/drawing/2014/main" id="{B7C63886-6F24-4B0B-A176-F19142252A40}"/>
+                <a16:creationId xmlns:a16="http://schemas.microsoft.com/office/drawing/2014/main" id="{18570F4F-D530-49C4-BB9B-1F6B44917EE4}"/>
               </a:ext>
             </a:extLst>
           </p:cNvPr>
@@ -6236,7 +6236,7 @@
           <p:cNvPr id="15" name="">
             <a:extLst xmlns:a="http://schemas.openxmlformats.org/drawingml/2006/main">
               <a:ext uri="{FF2B5EF4-FFF2-40B4-BE49-F238E27FC236}">
-                <a16:creationId xmlns:a16="http://schemas.microsoft.com/office/drawing/2014/main" id="{40651A0C-36B7-4319-A8E8-A69E976D753A}"/>
+                <a16:creationId xmlns:a16="http://schemas.microsoft.com/office/drawing/2014/main" id="{364C37AA-7522-43D9-949E-062840818C5A}"/>
               </a:ext>
             </a:extLst>
           </p:cNvPr>
@@ -6268,7 +6268,7 @@
           <p:cNvPr id="16" name="">
             <a:extLst xmlns:a="http://schemas.openxmlformats.org/drawingml/2006/main">
               <a:ext uri="{FF2B5EF4-FFF2-40B4-BE49-F238E27FC236}">
-                <a16:creationId xmlns:a16="http://schemas.microsoft.com/office/drawing/2014/main" id="{56BE27A1-512D-4F31-8A9F-131F3E2264FB}"/>
+                <a16:creationId xmlns:a16="http://schemas.microsoft.com/office/drawing/2014/main" id="{410D2CA1-A1F3-46BD-8114-4E256BEC0897}"/>
               </a:ext>
             </a:extLst>
           </p:cNvPr>
@@ -6325,7 +6325,7 @@
           <p:cNvPr id="17" name="">
             <a:extLst xmlns:a="http://schemas.openxmlformats.org/drawingml/2006/main">
               <a:ext uri="{FF2B5EF4-FFF2-40B4-BE49-F238E27FC236}">
-                <a16:creationId xmlns:a16="http://schemas.microsoft.com/office/drawing/2014/main" id="{2D3AA5DA-5818-47C0-9CFC-3A0A5AFB5C5E}"/>
+                <a16:creationId xmlns:a16="http://schemas.microsoft.com/office/drawing/2014/main" id="{C5C0BC2F-D794-4619-B41A-AE6C4885880C}"/>
               </a:ext>
             </a:extLst>
           </p:cNvPr>
@@ -6382,7 +6382,7 @@
           <p:cNvPr id="18" name="">
             <a:extLst xmlns:a="http://schemas.openxmlformats.org/drawingml/2006/main">
               <a:ext uri="{FF2B5EF4-FFF2-40B4-BE49-F238E27FC236}">
-                <a16:creationId xmlns:a16="http://schemas.microsoft.com/office/drawing/2014/main" id="{197B8016-5FD4-4B4E-A113-538C7D258EC2}"/>
+                <a16:creationId xmlns:a16="http://schemas.microsoft.com/office/drawing/2014/main" id="{17AE6613-7396-4068-9B6E-6026259A2D7D}"/>
               </a:ext>
             </a:extLst>
           </p:cNvPr>
@@ -6416,7 +6416,7 @@
           <p:cNvPr id="19" name="">
             <a:extLst xmlns:a="http://schemas.openxmlformats.org/drawingml/2006/main">
               <a:ext uri="{FF2B5EF4-FFF2-40B4-BE49-F238E27FC236}">
-                <a16:creationId xmlns:a16="http://schemas.microsoft.com/office/drawing/2014/main" id="{973ABF14-5F90-4ED6-8663-B6BFDC7E713C}"/>
+                <a16:creationId xmlns:a16="http://schemas.microsoft.com/office/drawing/2014/main" id="{F46D19FB-EF92-4100-B9C9-874181262814}"/>
               </a:ext>
             </a:extLst>
           </p:cNvPr>
@@ -6448,7 +6448,7 @@
           <p:cNvPr id="20" name="">
             <a:extLst xmlns:a="http://schemas.openxmlformats.org/drawingml/2006/main">
               <a:ext uri="{FF2B5EF4-FFF2-40B4-BE49-F238E27FC236}">
-                <a16:creationId xmlns:a16="http://schemas.microsoft.com/office/drawing/2014/main" id="{816D4A40-14FF-4174-A709-6A1D1E900BFB}"/>
+                <a16:creationId xmlns:a16="http://schemas.microsoft.com/office/drawing/2014/main" id="{9CA93821-D353-4A00-A54F-0F0B74990DFB}"/>
               </a:ext>
             </a:extLst>
           </p:cNvPr>
@@ -6505,7 +6505,7 @@
           <p:cNvPr id="21" name="">
             <a:extLst xmlns:a="http://schemas.openxmlformats.org/drawingml/2006/main">
               <a:ext uri="{FF2B5EF4-FFF2-40B4-BE49-F238E27FC236}">
-                <a16:creationId xmlns:a16="http://schemas.microsoft.com/office/drawing/2014/main" id="{38C4B573-02D4-4B99-958C-9E74B4981614}"/>
+                <a16:creationId xmlns:a16="http://schemas.microsoft.com/office/drawing/2014/main" id="{1F6AA466-9013-40FD-987E-8BBAB278ED28}"/>
               </a:ext>
             </a:extLst>
           </p:cNvPr>
@@ -6562,7 +6562,7 @@
           <p:cNvPr id="22" name="">
             <a:extLst xmlns:a="http://schemas.openxmlformats.org/drawingml/2006/main">
               <a:ext uri="{FF2B5EF4-FFF2-40B4-BE49-F238E27FC236}">
-                <a16:creationId xmlns:a16="http://schemas.microsoft.com/office/drawing/2014/main" id="{25B1D0FC-9295-4D8F-8E37-7C928F050701}"/>
+                <a16:creationId xmlns:a16="http://schemas.microsoft.com/office/drawing/2014/main" id="{26089499-BB19-48E8-9255-F685388642AA}"/>
               </a:ext>
             </a:extLst>
           </p:cNvPr>
@@ -6617,7 +6617,7 @@
     </p:spTree>
     <p:extLst>
       <p:ext uri="{BB962C8B-B14F-4D97-AF65-F5344CB8AC3E}">
-        <p14:creationId xmlns:p14="http://schemas.microsoft.com/office/powerpoint/2010/main" val="1993525510"/>
+        <p14:creationId xmlns:p14="http://schemas.microsoft.com/office/powerpoint/2010/main" val="1928205482"/>
       </p:ext>
     </p:extLst>
   </p:cSld>
@@ -6818,7 +6818,7 @@
           <p:cNvPr id="16" name="">
             <a:extLst xmlns:a="http://schemas.openxmlformats.org/drawingml/2006/main">
               <a:ext uri="{FF2B5EF4-FFF2-40B4-BE49-F238E27FC236}">
-                <a16:creationId xmlns:a16="http://schemas.microsoft.com/office/drawing/2014/main" id="{FFB672E1-23FB-48A0-B968-D8156FF6ADF7}"/>
+                <a16:creationId xmlns:a16="http://schemas.microsoft.com/office/drawing/2014/main" id="{64E96810-57EA-47D7-96CE-92A52B40A13F}"/>
               </a:ext>
             </a:extLst>
           </p:cNvPr>
@@ -6850,7 +6850,7 @@
           <p:cNvPr id="2" name="">
             <a:extLst xmlns:a="http://schemas.openxmlformats.org/drawingml/2006/main">
               <a:ext uri="{FF2B5EF4-FFF2-40B4-BE49-F238E27FC236}">
-                <a16:creationId xmlns:a16="http://schemas.microsoft.com/office/drawing/2014/main" id="{8DA0D5F2-AAE6-4244-9843-20C06CF805EE}"/>
+                <a16:creationId xmlns:a16="http://schemas.microsoft.com/office/drawing/2014/main" id="{2DE30014-5D2E-43AE-AA68-7F88BB3AB55C}"/>
               </a:ext>
             </a:extLst>
           </p:cNvPr>
@@ -6907,7 +6907,7 @@
           <p:cNvPr id="3" name="">
             <a:extLst xmlns:a="http://schemas.openxmlformats.org/drawingml/2006/main">
               <a:ext uri="{FF2B5EF4-FFF2-40B4-BE49-F238E27FC236}">
-                <a16:creationId xmlns:a16="http://schemas.microsoft.com/office/drawing/2014/main" id="{2E794222-CA14-4AE6-A3FA-BE35502C948B}"/>
+                <a16:creationId xmlns:a16="http://schemas.microsoft.com/office/drawing/2014/main" id="{D0ABC8B7-D901-4AAB-82BC-57C112C43499}"/>
               </a:ext>
             </a:extLst>
           </p:cNvPr>
@@ -6939,7 +6939,7 @@
           <p:cNvPr id="4" name="">
             <a:extLst xmlns:a="http://schemas.openxmlformats.org/drawingml/2006/main">
               <a:ext uri="{FF2B5EF4-FFF2-40B4-BE49-F238E27FC236}">
-                <a16:creationId xmlns:a16="http://schemas.microsoft.com/office/drawing/2014/main" id="{7AD6124A-E4D9-4A97-8B29-C37DC42B1D6F}"/>
+                <a16:creationId xmlns:a16="http://schemas.microsoft.com/office/drawing/2014/main" id="{A63CE6EE-3189-4293-BA93-5F0CDCA01FF0}"/>
               </a:ext>
             </a:extLst>
           </p:cNvPr>
@@ -6996,7 +6996,7 @@
           <p:cNvPr id="5" name="">
             <a:extLst xmlns:a="http://schemas.openxmlformats.org/drawingml/2006/main">
               <a:ext uri="{FF2B5EF4-FFF2-40B4-BE49-F238E27FC236}">
-                <a16:creationId xmlns:a16="http://schemas.microsoft.com/office/drawing/2014/main" id="{032E93D6-8153-4863-958B-9BDED9663026}"/>
+                <a16:creationId xmlns:a16="http://schemas.microsoft.com/office/drawing/2014/main" id="{3F76401D-0798-4CA8-BC62-6ABC26BE287A}"/>
               </a:ext>
             </a:extLst>
           </p:cNvPr>
@@ -7053,7 +7053,7 @@
           <p:cNvPr id="6" name="">
             <a:extLst xmlns:a="http://schemas.openxmlformats.org/drawingml/2006/main">
               <a:ext uri="{FF2B5EF4-FFF2-40B4-BE49-F238E27FC236}">
-                <a16:creationId xmlns:a16="http://schemas.microsoft.com/office/drawing/2014/main" id="{44C3EEFB-20F0-467B-9D2C-E19ACFBA50AE}"/>
+                <a16:creationId xmlns:a16="http://schemas.microsoft.com/office/drawing/2014/main" id="{59108091-3FAC-423A-B527-91B8CD9D8AA9}"/>
               </a:ext>
             </a:extLst>
           </p:cNvPr>
@@ -7110,7 +7110,7 @@
           <p:cNvPr id="7" name="">
             <a:extLst xmlns:a="http://schemas.openxmlformats.org/drawingml/2006/main">
               <a:ext uri="{FF2B5EF4-FFF2-40B4-BE49-F238E27FC236}">
-                <a16:creationId xmlns:a16="http://schemas.microsoft.com/office/drawing/2014/main" id="{223B47EC-1BB1-4EF4-B3F9-51B5C08ABB26}"/>
+                <a16:creationId xmlns:a16="http://schemas.microsoft.com/office/drawing/2014/main" id="{931424DD-C635-4C18-84B0-BFB0FE00EC8C}"/>
               </a:ext>
             </a:extLst>
           </p:cNvPr>
@@ -7142,7 +7142,7 @@
           <p:cNvPr id="8" name="">
             <a:extLst xmlns:a="http://schemas.openxmlformats.org/drawingml/2006/main">
               <a:ext uri="{FF2B5EF4-FFF2-40B4-BE49-F238E27FC236}">
-                <a16:creationId xmlns:a16="http://schemas.microsoft.com/office/drawing/2014/main" id="{33C0DBFA-3FC6-4D1D-BC08-31E06992F914}"/>
+                <a16:creationId xmlns:a16="http://schemas.microsoft.com/office/drawing/2014/main" id="{31241046-C9DD-47ED-9A67-95D96AE183E5}"/>
               </a:ext>
             </a:extLst>
           </p:cNvPr>
@@ -7199,7 +7199,7 @@
           <p:cNvPr id="9" name="">
             <a:extLst xmlns:a="http://schemas.openxmlformats.org/drawingml/2006/main">
               <a:ext uri="{FF2B5EF4-FFF2-40B4-BE49-F238E27FC236}">
-                <a16:creationId xmlns:a16="http://schemas.microsoft.com/office/drawing/2014/main" id="{781D51C0-5C23-4DC7-BED2-4E59429B1268}"/>
+                <a16:creationId xmlns:a16="http://schemas.microsoft.com/office/drawing/2014/main" id="{F76201D0-952A-4A9D-8EA8-536DC713CC72}"/>
               </a:ext>
             </a:extLst>
           </p:cNvPr>
@@ -7256,7 +7256,7 @@
           <p:cNvPr id="10" name="">
             <a:extLst xmlns:a="http://schemas.openxmlformats.org/drawingml/2006/main">
               <a:ext uri="{FF2B5EF4-FFF2-40B4-BE49-F238E27FC236}">
-                <a16:creationId xmlns:a16="http://schemas.microsoft.com/office/drawing/2014/main" id="{EDAB2C18-898D-4B6E-943F-53FD24E8C775}"/>
+                <a16:creationId xmlns:a16="http://schemas.microsoft.com/office/drawing/2014/main" id="{7C007295-14D4-403A-BDC1-3FA19B98E4DB}"/>
               </a:ext>
             </a:extLst>
           </p:cNvPr>
@@ -7313,7 +7313,7 @@
           <p:cNvPr id="11" name="">
             <a:extLst xmlns:a="http://schemas.openxmlformats.org/drawingml/2006/main">
               <a:ext uri="{FF2B5EF4-FFF2-40B4-BE49-F238E27FC236}">
-                <a16:creationId xmlns:a16="http://schemas.microsoft.com/office/drawing/2014/main" id="{AA72C331-AF0E-4822-BA7F-A4535381F14D}"/>
+                <a16:creationId xmlns:a16="http://schemas.microsoft.com/office/drawing/2014/main" id="{4B81F2A5-E05A-47C6-8AD8-ADB64DACC6EA}"/>
               </a:ext>
             </a:extLst>
           </p:cNvPr>
@@ -7345,7 +7345,7 @@
           <p:cNvPr id="12" name="">
             <a:extLst xmlns:a="http://schemas.openxmlformats.org/drawingml/2006/main">
               <a:ext uri="{FF2B5EF4-FFF2-40B4-BE49-F238E27FC236}">
-                <a16:creationId xmlns:a16="http://schemas.microsoft.com/office/drawing/2014/main" id="{AE0A1EA3-69E3-440E-A860-3C72F108492C}"/>
+                <a16:creationId xmlns:a16="http://schemas.microsoft.com/office/drawing/2014/main" id="{C7540255-DF69-4BCD-A4EC-1DE5ECFD8CD4}"/>
               </a:ext>
             </a:extLst>
           </p:cNvPr>
@@ -7402,7 +7402,7 @@
           <p:cNvPr id="13" name="">
             <a:extLst xmlns:a="http://schemas.openxmlformats.org/drawingml/2006/main">
               <a:ext uri="{FF2B5EF4-FFF2-40B4-BE49-F238E27FC236}">
-                <a16:creationId xmlns:a16="http://schemas.microsoft.com/office/drawing/2014/main" id="{1B5C00DE-66A5-42DF-8652-E7EA461B365D}"/>
+                <a16:creationId xmlns:a16="http://schemas.microsoft.com/office/drawing/2014/main" id="{FAB78FDC-5406-46B9-AE91-B690108CA1DD}"/>
               </a:ext>
             </a:extLst>
           </p:cNvPr>
@@ -7459,7 +7459,7 @@
           <p:cNvPr id="14" name="">
             <a:extLst xmlns:a="http://schemas.openxmlformats.org/drawingml/2006/main">
               <a:ext uri="{FF2B5EF4-FFF2-40B4-BE49-F238E27FC236}">
-                <a16:creationId xmlns:a16="http://schemas.microsoft.com/office/drawing/2014/main" id="{FD657CDD-E8DB-4600-B59F-CA6F595A5F50}"/>
+                <a16:creationId xmlns:a16="http://schemas.microsoft.com/office/drawing/2014/main" id="{E58EE1B6-0CA3-43D0-9ED2-DFE9E1A2BD19}"/>
               </a:ext>
             </a:extLst>
           </p:cNvPr>
@@ -7516,7 +7516,7 @@
           <p:cNvPr id="15" name="">
             <a:extLst xmlns:a="http://schemas.openxmlformats.org/drawingml/2006/main">
               <a:ext uri="{FF2B5EF4-FFF2-40B4-BE49-F238E27FC236}">
-                <a16:creationId xmlns:a16="http://schemas.microsoft.com/office/drawing/2014/main" id="{8A2C243F-5C9B-4F66-BBD5-B1F0AA9ED4F5}"/>
+                <a16:creationId xmlns:a16="http://schemas.microsoft.com/office/drawing/2014/main" id="{CB25EEF8-0825-47D3-9D6B-5CF34BB2C564}"/>
               </a:ext>
             </a:extLst>
           </p:cNvPr>
@@ -7571,7 +7571,7 @@
     </p:spTree>
     <p:extLst>
       <p:ext uri="{BB962C8B-B14F-4D97-AF65-F5344CB8AC3E}">
-        <p14:creationId xmlns:p14="http://schemas.microsoft.com/office/powerpoint/2010/main" val="499345487"/>
+        <p14:creationId xmlns:p14="http://schemas.microsoft.com/office/powerpoint/2010/main" val="796847936"/>
       </p:ext>
     </p:extLst>
   </p:cSld>
@@ -7772,7 +7772,7 @@
           <p:cNvPr id="23" name="">
             <a:extLst xmlns:a="http://schemas.openxmlformats.org/drawingml/2006/main">
               <a:ext uri="{FF2B5EF4-FFF2-40B4-BE49-F238E27FC236}">
-                <a16:creationId xmlns:a16="http://schemas.microsoft.com/office/drawing/2014/main" id="{57497DC2-8199-4F23-A30A-46F1ECE9CDEA}"/>
+                <a16:creationId xmlns:a16="http://schemas.microsoft.com/office/drawing/2014/main" id="{500ED4A9-529F-4B30-A9D8-174B7D3DBE0B}"/>
               </a:ext>
             </a:extLst>
           </p:cNvPr>
@@ -7804,7 +7804,7 @@
           <p:cNvPr id="2" name="">
             <a:extLst xmlns:a="http://schemas.openxmlformats.org/drawingml/2006/main">
               <a:ext uri="{FF2B5EF4-FFF2-40B4-BE49-F238E27FC236}">
-                <a16:creationId xmlns:a16="http://schemas.microsoft.com/office/drawing/2014/main" id="{26E4411A-D787-4A37-BD69-5B684231F4EF}"/>
+                <a16:creationId xmlns:a16="http://schemas.microsoft.com/office/drawing/2014/main" id="{4BB7E04B-768C-41AE-9F4F-98E8CE8D940D}"/>
               </a:ext>
             </a:extLst>
           </p:cNvPr>
@@ -7861,7 +7861,7 @@
           <p:cNvPr id="3" name="">
             <a:extLst xmlns:a="http://schemas.openxmlformats.org/drawingml/2006/main">
               <a:ext uri="{FF2B5EF4-FFF2-40B4-BE49-F238E27FC236}">
-                <a16:creationId xmlns:a16="http://schemas.microsoft.com/office/drawing/2014/main" id="{542E486B-44A7-47C2-905A-F39A647B99C6}"/>
+                <a16:creationId xmlns:a16="http://schemas.microsoft.com/office/drawing/2014/main" id="{2D84A35F-6927-4B3B-8DC0-675414447A5C}"/>
               </a:ext>
             </a:extLst>
           </p:cNvPr>
@@ -7893,7 +7893,7 @@
           <p:cNvPr id="4" name="">
             <a:extLst xmlns:a="http://schemas.openxmlformats.org/drawingml/2006/main">
               <a:ext uri="{FF2B5EF4-FFF2-40B4-BE49-F238E27FC236}">
-                <a16:creationId xmlns:a16="http://schemas.microsoft.com/office/drawing/2014/main" id="{84B62F64-2C06-4AF3-9243-AB967A54A4EC}"/>
+                <a16:creationId xmlns:a16="http://schemas.microsoft.com/office/drawing/2014/main" id="{96B797A6-8CEF-478F-8E2A-F5FC81BD653A}"/>
               </a:ext>
             </a:extLst>
           </p:cNvPr>
@@ -7950,7 +7950,7 @@
           <p:cNvPr id="5" name="">
             <a:extLst xmlns:a="http://schemas.openxmlformats.org/drawingml/2006/main">
               <a:ext uri="{FF2B5EF4-FFF2-40B4-BE49-F238E27FC236}">
-                <a16:creationId xmlns:a16="http://schemas.microsoft.com/office/drawing/2014/main" id="{3DEC727B-5024-4B27-B467-20D9C070AA35}"/>
+                <a16:creationId xmlns:a16="http://schemas.microsoft.com/office/drawing/2014/main" id="{A22F2369-6341-470F-A3AB-09C19B03B3CE}"/>
               </a:ext>
             </a:extLst>
           </p:cNvPr>
@@ -8007,7 +8007,7 @@
           <p:cNvPr id="6" name="">
             <a:extLst xmlns:a="http://schemas.openxmlformats.org/drawingml/2006/main">
               <a:ext uri="{FF2B5EF4-FFF2-40B4-BE49-F238E27FC236}">
-                <a16:creationId xmlns:a16="http://schemas.microsoft.com/office/drawing/2014/main" id="{3D7A18C0-8C17-4CBD-8087-9108C288E418}"/>
+                <a16:creationId xmlns:a16="http://schemas.microsoft.com/office/drawing/2014/main" id="{ED6A4A3A-0B8E-4800-A8AE-13C3C3A593AA}"/>
               </a:ext>
             </a:extLst>
           </p:cNvPr>
@@ -8064,7 +8064,7 @@
           <p:cNvPr id="7" name="">
             <a:extLst xmlns:a="http://schemas.openxmlformats.org/drawingml/2006/main">
               <a:ext uri="{FF2B5EF4-FFF2-40B4-BE49-F238E27FC236}">
-                <a16:creationId xmlns:a16="http://schemas.microsoft.com/office/drawing/2014/main" id="{D66E4F98-DFA7-4931-B33D-B65C0FA90A3A}"/>
+                <a16:creationId xmlns:a16="http://schemas.microsoft.com/office/drawing/2014/main" id="{7D40B452-7E9B-4155-96B3-37D017D50B60}"/>
               </a:ext>
             </a:extLst>
           </p:cNvPr>
@@ -8096,7 +8096,7 @@
           <p:cNvPr id="8" name="">
             <a:extLst xmlns:a="http://schemas.openxmlformats.org/drawingml/2006/main">
               <a:ext uri="{FF2B5EF4-FFF2-40B4-BE49-F238E27FC236}">
-                <a16:creationId xmlns:a16="http://schemas.microsoft.com/office/drawing/2014/main" id="{A88F6AC6-3F4C-4A9D-B828-DA5E3D8390AC}"/>
+                <a16:creationId xmlns:a16="http://schemas.microsoft.com/office/drawing/2014/main" id="{459D6B4F-1C09-4A93-B9BA-9423E22317AE}"/>
               </a:ext>
             </a:extLst>
           </p:cNvPr>
@@ -8153,7 +8153,7 @@
           <p:cNvPr id="9" name="">
             <a:extLst xmlns:a="http://schemas.openxmlformats.org/drawingml/2006/main">
               <a:ext uri="{FF2B5EF4-FFF2-40B4-BE49-F238E27FC236}">
-                <a16:creationId xmlns:a16="http://schemas.microsoft.com/office/drawing/2014/main" id="{6D28A42B-3654-4F7D-9F33-D02639488B26}"/>
+                <a16:creationId xmlns:a16="http://schemas.microsoft.com/office/drawing/2014/main" id="{F7110A6E-028F-424D-93C6-017E7957B753}"/>
               </a:ext>
             </a:extLst>
           </p:cNvPr>
@@ -8210,19 +8210,19 @@
           <p:cNvPr id="10" name="">
             <a:extLst xmlns:a="http://schemas.openxmlformats.org/drawingml/2006/main">
               <a:ext uri="{FF2B5EF4-FFF2-40B4-BE49-F238E27FC236}">
-                <a16:creationId xmlns:a16="http://schemas.microsoft.com/office/drawing/2014/main" id="{B38A17AC-689E-41F2-8625-92585E3D431A}"/>
-              </a:ext>
-            </a:extLst>
-          </p:cNvPr>
-          <p:cNvSpPr>
-            <a:spLocks xmlns:a="http://schemas.openxmlformats.org/drawingml/2006/main" noGrp="1"/>
-          </p:cNvSpPr>
-          <p:nvPr/>
-        </p:nvSpPr>
-        <p:spPr>
-          <a:xfrm xmlns:a="http://schemas.openxmlformats.org/drawingml/2006/main">
-            <a:off x="914400" y="1257300"/>
-            <a:ext cx="10363200" cy="781050"/>
+                <a16:creationId xmlns:a16="http://schemas.microsoft.com/office/drawing/2014/main" id="{648BB958-C92C-4A0E-9635-CBD1FF799E4D}"/>
+              </a:ext>
+            </a:extLst>
+          </p:cNvPr>
+          <p:cNvSpPr>
+            <a:spLocks xmlns:a="http://schemas.openxmlformats.org/drawingml/2006/main" noGrp="1"/>
+          </p:cNvSpPr>
+          <p:nvPr/>
+        </p:nvSpPr>
+        <p:spPr>
+          <a:xfrm xmlns:a="http://schemas.openxmlformats.org/drawingml/2006/main">
+            <a:off x="857250" y="1219200"/>
+            <a:ext cx="10477500" cy="742950"/>
           </a:xfrm>
           <a:prstGeom xmlns:a="http://schemas.openxmlformats.org/drawingml/2006/main" prst="rect">
             <a:avLst/>
@@ -8239,7 +8239,7 @@
           <a:lstStyle xmlns:a="http://schemas.openxmlformats.org/drawingml/2006/main"/>
           <a:p xmlns:a="http://schemas.openxmlformats.org/drawingml/2006/main">
             <a:pPr algn="ctr">
-              <a:defRPr sz="2175" b="1">
+              <a:defRPr sz="2100" b="1">
                 <a:solidFill>
                   <a:srgbClr val="17253A"/>
                 </a:solidFill>
@@ -8249,7 +8249,7 @@
               </a:defRPr>
             </a:pPr>
             <a:r>
-              <a:rPr sz="2175" b="1">
+              <a:rPr sz="2100" b="1">
                 <a:solidFill>
                   <a:srgbClr val="17253A"/>
                 </a:solidFill>
@@ -8267,28 +8267,30 @@
           <p:cNvPr id="11" name="">
             <a:extLst xmlns:a="http://schemas.openxmlformats.org/drawingml/2006/main">
               <a:ext uri="{FF2B5EF4-FFF2-40B4-BE49-F238E27FC236}">
-                <a16:creationId xmlns:a16="http://schemas.microsoft.com/office/drawing/2014/main" id="{3FFEA55D-3B12-428D-9889-715FB1C49B34}"/>
-              </a:ext>
-            </a:extLst>
-          </p:cNvPr>
-          <p:cNvSpPr>
-            <a:spLocks xmlns:a="http://schemas.openxmlformats.org/drawingml/2006/main" noGrp="1"/>
-          </p:cNvSpPr>
-          <p:nvPr/>
-        </p:nvSpPr>
-        <p:spPr>
-          <a:xfrm xmlns:a="http://schemas.openxmlformats.org/drawingml/2006/main">
-            <a:off x="1000125" y="2247900"/>
-            <a:ext cx="476250" cy="476250"/>
-          </a:xfrm>
-          <a:prstGeom xmlns:a="http://schemas.openxmlformats.org/drawingml/2006/main" prst="ellipse">
+                <a16:creationId xmlns:a16="http://schemas.microsoft.com/office/drawing/2014/main" id="{EF4F1D97-5B86-4FDB-A022-7D83FDF0A01B}"/>
+              </a:ext>
+            </a:extLst>
+          </p:cNvPr>
+          <p:cNvSpPr>
+            <a:spLocks xmlns:a="http://schemas.openxmlformats.org/drawingml/2006/main" noGrp="1"/>
+          </p:cNvSpPr>
+          <p:nvPr/>
+        </p:nvSpPr>
+        <p:spPr>
+          <a:xfrm xmlns:a="http://schemas.openxmlformats.org/drawingml/2006/main">
+            <a:off x="971550" y="2124075"/>
+            <a:ext cx="38100" cy="3524250"/>
+          </a:xfrm>
+          <a:prstGeom xmlns:a="http://schemas.openxmlformats.org/drawingml/2006/main" prst="rect">
             <a:avLst/>
           </a:prstGeom>
           <a:solidFill xmlns:a="http://schemas.openxmlformats.org/drawingml/2006/main">
-            <a:srgbClr val="18324A"/>
+            <a:srgbClr val="2C6E73"/>
           </a:solidFill>
           <a:ln xmlns:a="http://schemas.openxmlformats.org/drawingml/2006/main" w="0">
-            <a:noFill/>
+            <a:solidFill>
+              <a:srgbClr val="2C6E73"/>
+            </a:solidFill>
           </a:ln>
         </p:spPr>
       </p:sp>
@@ -8297,19 +8299,19 @@
           <p:cNvPr id="12" name="">
             <a:extLst xmlns:a="http://schemas.openxmlformats.org/drawingml/2006/main">
               <a:ext uri="{FF2B5EF4-FFF2-40B4-BE49-F238E27FC236}">
-                <a16:creationId xmlns:a16="http://schemas.microsoft.com/office/drawing/2014/main" id="{74542400-ACC8-434E-977F-F423ABA0DC24}"/>
-              </a:ext>
-            </a:extLst>
-          </p:cNvPr>
-          <p:cNvSpPr>
-            <a:spLocks xmlns:a="http://schemas.openxmlformats.org/drawingml/2006/main" noGrp="1"/>
-          </p:cNvSpPr>
-          <p:nvPr/>
-        </p:nvSpPr>
-        <p:spPr>
-          <a:xfrm xmlns:a="http://schemas.openxmlformats.org/drawingml/2006/main">
-            <a:off x="1000125" y="2276475"/>
-            <a:ext cx="476250" cy="419100"/>
+                <a16:creationId xmlns:a16="http://schemas.microsoft.com/office/drawing/2014/main" id="{5E7B5934-18A1-4C44-91D5-4C028EF6F880}"/>
+              </a:ext>
+            </a:extLst>
+          </p:cNvPr>
+          <p:cNvSpPr>
+            <a:spLocks xmlns:a="http://schemas.openxmlformats.org/drawingml/2006/main" noGrp="1"/>
+          </p:cNvSpPr>
+          <p:nvPr/>
+        </p:nvSpPr>
+        <p:spPr>
+          <a:xfrm xmlns:a="http://schemas.openxmlformats.org/drawingml/2006/main">
+            <a:off x="1162050" y="2200275"/>
+            <a:ext cx="400050" cy="400050"/>
           </a:xfrm>
           <a:prstGeom xmlns:a="http://schemas.openxmlformats.org/drawingml/2006/main" prst="rect">
             <a:avLst/>
@@ -8326,9 +8328,9 @@
           <a:lstStyle xmlns:a="http://schemas.openxmlformats.org/drawingml/2006/main"/>
           <a:p xmlns:a="http://schemas.openxmlformats.org/drawingml/2006/main">
             <a:pPr algn="ctr">
-              <a:defRPr sz="1350" b="1">
-                <a:solidFill>
-                  <a:srgbClr val="FFFFFF"/>
+              <a:defRPr sz="1125" b="1">
+                <a:solidFill>
+                  <a:srgbClr val="2C6E73"/>
                 </a:solidFill>
                 <a:latin typeface="Arial"/>
                 <a:ea typeface="Arial"/>
@@ -8336,9 +8338,9 @@
               </a:defRPr>
             </a:pPr>
             <a:r>
-              <a:rPr sz="1350" b="1">
-                <a:solidFill>
-                  <a:srgbClr val="FFFFFF"/>
+              <a:rPr sz="1125" b="1">
+                <a:solidFill>
+                  <a:srgbClr val="2C6E73"/>
                 </a:solidFill>
                 <a:latin typeface="Arial"/>
                 <a:ea typeface="Arial"/>
@@ -8354,19 +8356,19 @@
           <p:cNvPr id="13" name="">
             <a:extLst xmlns:a="http://schemas.openxmlformats.org/drawingml/2006/main">
               <a:ext uri="{FF2B5EF4-FFF2-40B4-BE49-F238E27FC236}">
-                <a16:creationId xmlns:a16="http://schemas.microsoft.com/office/drawing/2014/main" id="{BE7F33CF-D5D7-4301-801A-D707EEED8E1F}"/>
-              </a:ext>
-            </a:extLst>
-          </p:cNvPr>
-          <p:cNvSpPr>
-            <a:spLocks xmlns:a="http://schemas.openxmlformats.org/drawingml/2006/main" noGrp="1"/>
-          </p:cNvSpPr>
-          <p:nvPr/>
-        </p:nvSpPr>
-        <p:spPr>
-          <a:xfrm xmlns:a="http://schemas.openxmlformats.org/drawingml/2006/main">
-            <a:off x="1714500" y="2181225"/>
-            <a:ext cx="9429750" cy="609600"/>
+                <a16:creationId xmlns:a16="http://schemas.microsoft.com/office/drawing/2014/main" id="{A6C3BF2E-03DF-4209-B3EE-9862AE5814A8}"/>
+              </a:ext>
+            </a:extLst>
+          </p:cNvPr>
+          <p:cNvSpPr>
+            <a:spLocks xmlns:a="http://schemas.openxmlformats.org/drawingml/2006/main" noGrp="1"/>
+          </p:cNvSpPr>
+          <p:nvPr/>
+        </p:nvSpPr>
+        <p:spPr>
+          <a:xfrm xmlns:a="http://schemas.openxmlformats.org/drawingml/2006/main">
+            <a:off x="1714500" y="2114550"/>
+            <a:ext cx="9525000" cy="809625"/>
           </a:xfrm>
           <a:prstGeom xmlns:a="http://schemas.openxmlformats.org/drawingml/2006/main" prst="rect">
             <a:avLst/>
@@ -8383,7 +8385,7 @@
           <a:lstStyle xmlns:a="http://schemas.openxmlformats.org/drawingml/2006/main"/>
           <a:p xmlns:a="http://schemas.openxmlformats.org/drawingml/2006/main">
             <a:pPr algn="l">
-              <a:defRPr sz="1500" b="0">
+              <a:defRPr sz="1725" b="0">
                 <a:solidFill>
                   <a:srgbClr val="17253A"/>
                 </a:solidFill>
@@ -8393,7 +8395,7 @@
               </a:defRPr>
             </a:pPr>
             <a:r>
-              <a:rPr sz="1500" b="0">
+              <a:rPr sz="1725" b="0">
                 <a:solidFill>
                   <a:srgbClr val="17253A"/>
                 </a:solidFill>
@@ -8401,7 +8403,7 @@
                 <a:ea typeface="Arial"/>
                 <a:cs typeface="Arial"/>
               </a:rPr>
-              <a:t>Identify the structure: Convert mixed numbers to improper fractions when needed.</a:t>
+              <a:t>1/4 × 3/5</a:t>
             </a:r>
           </a:p>
         </p:txBody>
@@ -8411,28 +8413,30 @@
           <p:cNvPr id="14" name="">
             <a:extLst xmlns:a="http://schemas.openxmlformats.org/drawingml/2006/main">
               <a:ext uri="{FF2B5EF4-FFF2-40B4-BE49-F238E27FC236}">
-                <a16:creationId xmlns:a16="http://schemas.microsoft.com/office/drawing/2014/main" id="{66EB64DA-9AD2-4EF7-8D19-6B9D54AABCA8}"/>
-              </a:ext>
-            </a:extLst>
-          </p:cNvPr>
-          <p:cNvSpPr>
-            <a:spLocks xmlns:a="http://schemas.openxmlformats.org/drawingml/2006/main" noGrp="1"/>
-          </p:cNvSpPr>
-          <p:nvPr/>
-        </p:nvSpPr>
-        <p:spPr>
-          <a:xfrm xmlns:a="http://schemas.openxmlformats.org/drawingml/2006/main">
-            <a:off x="1000125" y="2990850"/>
-            <a:ext cx="476250" cy="476250"/>
-          </a:xfrm>
-          <a:prstGeom xmlns:a="http://schemas.openxmlformats.org/drawingml/2006/main" prst="ellipse">
+                <a16:creationId xmlns:a16="http://schemas.microsoft.com/office/drawing/2014/main" id="{97851B99-1CE7-44ED-BC0D-3CBF09032999}"/>
+              </a:ext>
+            </a:extLst>
+          </p:cNvPr>
+          <p:cNvSpPr>
+            <a:spLocks xmlns:a="http://schemas.openxmlformats.org/drawingml/2006/main" noGrp="1"/>
+          </p:cNvSpPr>
+          <p:nvPr/>
+        </p:nvSpPr>
+        <p:spPr>
+          <a:xfrm xmlns:a="http://schemas.openxmlformats.org/drawingml/2006/main">
+            <a:off x="1714500" y="2943225"/>
+            <a:ext cx="9334500" cy="9525"/>
+          </a:xfrm>
+          <a:prstGeom xmlns:a="http://schemas.openxmlformats.org/drawingml/2006/main" prst="rect">
             <a:avLst/>
           </a:prstGeom>
           <a:solidFill xmlns:a="http://schemas.openxmlformats.org/drawingml/2006/main">
-            <a:srgbClr val="2C6E73"/>
+            <a:srgbClr val="D9E0E6"/>
           </a:solidFill>
           <a:ln xmlns:a="http://schemas.openxmlformats.org/drawingml/2006/main" w="0">
-            <a:noFill/>
+            <a:solidFill>
+              <a:srgbClr val="D9E0E6"/>
+            </a:solidFill>
           </a:ln>
         </p:spPr>
       </p:sp>
@@ -8441,19 +8445,19 @@
           <p:cNvPr id="15" name="">
             <a:extLst xmlns:a="http://schemas.openxmlformats.org/drawingml/2006/main">
               <a:ext uri="{FF2B5EF4-FFF2-40B4-BE49-F238E27FC236}">
-                <a16:creationId xmlns:a16="http://schemas.microsoft.com/office/drawing/2014/main" id="{30E0799F-C097-4C57-B206-319B38668602}"/>
-              </a:ext>
-            </a:extLst>
-          </p:cNvPr>
-          <p:cNvSpPr>
-            <a:spLocks xmlns:a="http://schemas.openxmlformats.org/drawingml/2006/main" noGrp="1"/>
-          </p:cNvSpPr>
-          <p:nvPr/>
-        </p:nvSpPr>
-        <p:spPr>
-          <a:xfrm xmlns:a="http://schemas.openxmlformats.org/drawingml/2006/main">
-            <a:off x="1000125" y="3019425"/>
-            <a:ext cx="476250" cy="419100"/>
+                <a16:creationId xmlns:a16="http://schemas.microsoft.com/office/drawing/2014/main" id="{7524E1BB-6D35-4EF4-986D-DE2FD48856DC}"/>
+              </a:ext>
+            </a:extLst>
+          </p:cNvPr>
+          <p:cNvSpPr>
+            <a:spLocks xmlns:a="http://schemas.openxmlformats.org/drawingml/2006/main" noGrp="1"/>
+          </p:cNvSpPr>
+          <p:nvPr/>
+        </p:nvSpPr>
+        <p:spPr>
+          <a:xfrm xmlns:a="http://schemas.openxmlformats.org/drawingml/2006/main">
+            <a:off x="1162050" y="3076575"/>
+            <a:ext cx="400050" cy="400050"/>
           </a:xfrm>
           <a:prstGeom xmlns:a="http://schemas.openxmlformats.org/drawingml/2006/main" prst="rect">
             <a:avLst/>
@@ -8470,9 +8474,9 @@
           <a:lstStyle xmlns:a="http://schemas.openxmlformats.org/drawingml/2006/main"/>
           <a:p xmlns:a="http://schemas.openxmlformats.org/drawingml/2006/main">
             <a:pPr algn="ctr">
-              <a:defRPr sz="1350" b="1">
-                <a:solidFill>
-                  <a:srgbClr val="FFFFFF"/>
+              <a:defRPr sz="1125" b="1">
+                <a:solidFill>
+                  <a:srgbClr val="2C6E73"/>
                 </a:solidFill>
                 <a:latin typeface="Arial"/>
                 <a:ea typeface="Arial"/>
@@ -8480,9 +8484,9 @@
               </a:defRPr>
             </a:pPr>
             <a:r>
-              <a:rPr sz="1350" b="1">
-                <a:solidFill>
-                  <a:srgbClr val="FFFFFF"/>
+              <a:rPr sz="1125" b="1">
+                <a:solidFill>
+                  <a:srgbClr val="2C6E73"/>
                 </a:solidFill>
                 <a:latin typeface="Arial"/>
                 <a:ea typeface="Arial"/>
@@ -8498,19 +8502,19 @@
           <p:cNvPr id="16" name="">
             <a:extLst xmlns:a="http://schemas.openxmlformats.org/drawingml/2006/main">
               <a:ext uri="{FF2B5EF4-FFF2-40B4-BE49-F238E27FC236}">
-                <a16:creationId xmlns:a16="http://schemas.microsoft.com/office/drawing/2014/main" id="{155B1952-EAB5-43BE-9290-A750633ACBF6}"/>
-              </a:ext>
-            </a:extLst>
-          </p:cNvPr>
-          <p:cNvSpPr>
-            <a:spLocks xmlns:a="http://schemas.openxmlformats.org/drawingml/2006/main" noGrp="1"/>
-          </p:cNvSpPr>
-          <p:nvPr/>
-        </p:nvSpPr>
-        <p:spPr>
-          <a:xfrm xmlns:a="http://schemas.openxmlformats.org/drawingml/2006/main">
-            <a:off x="1714500" y="2924175"/>
-            <a:ext cx="9429750" cy="609600"/>
+                <a16:creationId xmlns:a16="http://schemas.microsoft.com/office/drawing/2014/main" id="{7D5DCEF7-EDD0-4695-A01C-E1C38839FA9F}"/>
+              </a:ext>
+            </a:extLst>
+          </p:cNvPr>
+          <p:cNvSpPr>
+            <a:spLocks xmlns:a="http://schemas.openxmlformats.org/drawingml/2006/main" noGrp="1"/>
+          </p:cNvSpPr>
+          <p:nvPr/>
+        </p:nvSpPr>
+        <p:spPr>
+          <a:xfrm xmlns:a="http://schemas.openxmlformats.org/drawingml/2006/main">
+            <a:off x="1714500" y="2990850"/>
+            <a:ext cx="9525000" cy="809625"/>
           </a:xfrm>
           <a:prstGeom xmlns:a="http://schemas.openxmlformats.org/drawingml/2006/main" prst="rect">
             <a:avLst/>
@@ -8527,7 +8531,7 @@
           <a:lstStyle xmlns:a="http://schemas.openxmlformats.org/drawingml/2006/main"/>
           <a:p xmlns:a="http://schemas.openxmlformats.org/drawingml/2006/main">
             <a:pPr algn="l">
-              <a:defRPr sz="1500" b="0">
+              <a:defRPr sz="1725" b="0">
                 <a:solidFill>
                   <a:srgbClr val="17253A"/>
                 </a:solidFill>
@@ -8537,7 +8541,7 @@
               </a:defRPr>
             </a:pPr>
             <a:r>
-              <a:rPr sz="1500" b="0">
+              <a:rPr sz="1725" b="0">
                 <a:solidFill>
                   <a:srgbClr val="17253A"/>
                 </a:solidFill>
@@ -8545,7 +8549,7 @@
                 <a:ea typeface="Arial"/>
                 <a:cs typeface="Arial"/>
               </a:rPr>
-              <a:t>Set up the method: Multiply numerators and denominators, cancelling common factors efficiently.</a:t>
+              <a:t>Numerators: 1 × 3 = 3</a:t>
             </a:r>
           </a:p>
         </p:txBody>
@@ -8555,28 +8559,30 @@
           <p:cNvPr id="17" name="">
             <a:extLst xmlns:a="http://schemas.openxmlformats.org/drawingml/2006/main">
               <a:ext uri="{FF2B5EF4-FFF2-40B4-BE49-F238E27FC236}">
-                <a16:creationId xmlns:a16="http://schemas.microsoft.com/office/drawing/2014/main" id="{FEAD84F8-39D4-47BA-8534-0E3C6EC753BD}"/>
-              </a:ext>
-            </a:extLst>
-          </p:cNvPr>
-          <p:cNvSpPr>
-            <a:spLocks xmlns:a="http://schemas.openxmlformats.org/drawingml/2006/main" noGrp="1"/>
-          </p:cNvSpPr>
-          <p:nvPr/>
-        </p:nvSpPr>
-        <p:spPr>
-          <a:xfrm xmlns:a="http://schemas.openxmlformats.org/drawingml/2006/main">
-            <a:off x="1000125" y="3733800"/>
-            <a:ext cx="476250" cy="476250"/>
-          </a:xfrm>
-          <a:prstGeom xmlns:a="http://schemas.openxmlformats.org/drawingml/2006/main" prst="ellipse">
+                <a16:creationId xmlns:a16="http://schemas.microsoft.com/office/drawing/2014/main" id="{52BCE4AC-3E68-435A-8672-9AA7E81EE636}"/>
+              </a:ext>
+            </a:extLst>
+          </p:cNvPr>
+          <p:cNvSpPr>
+            <a:spLocks xmlns:a="http://schemas.openxmlformats.org/drawingml/2006/main" noGrp="1"/>
+          </p:cNvSpPr>
+          <p:nvPr/>
+        </p:nvSpPr>
+        <p:spPr>
+          <a:xfrm xmlns:a="http://schemas.openxmlformats.org/drawingml/2006/main">
+            <a:off x="1714500" y="3819525"/>
+            <a:ext cx="9334500" cy="9525"/>
+          </a:xfrm>
+          <a:prstGeom xmlns:a="http://schemas.openxmlformats.org/drawingml/2006/main" prst="rect">
             <a:avLst/>
           </a:prstGeom>
           <a:solidFill xmlns:a="http://schemas.openxmlformats.org/drawingml/2006/main">
-            <a:srgbClr val="2C6E73"/>
+            <a:srgbClr val="D9E0E6"/>
           </a:solidFill>
           <a:ln xmlns:a="http://schemas.openxmlformats.org/drawingml/2006/main" w="0">
-            <a:noFill/>
+            <a:solidFill>
+              <a:srgbClr val="D9E0E6"/>
+            </a:solidFill>
           </a:ln>
         </p:spPr>
       </p:sp>
@@ -8585,19 +8591,19 @@
           <p:cNvPr id="18" name="">
             <a:extLst xmlns:a="http://schemas.openxmlformats.org/drawingml/2006/main">
               <a:ext uri="{FF2B5EF4-FFF2-40B4-BE49-F238E27FC236}">
-                <a16:creationId xmlns:a16="http://schemas.microsoft.com/office/drawing/2014/main" id="{1101D2D4-D6AB-494F-821E-E2E364184580}"/>
-              </a:ext>
-            </a:extLst>
-          </p:cNvPr>
-          <p:cNvSpPr>
-            <a:spLocks xmlns:a="http://schemas.openxmlformats.org/drawingml/2006/main" noGrp="1"/>
-          </p:cNvSpPr>
-          <p:nvPr/>
-        </p:nvSpPr>
-        <p:spPr>
-          <a:xfrm xmlns:a="http://schemas.openxmlformats.org/drawingml/2006/main">
-            <a:off x="1000125" y="3762375"/>
-            <a:ext cx="476250" cy="419100"/>
+                <a16:creationId xmlns:a16="http://schemas.microsoft.com/office/drawing/2014/main" id="{B287C191-351C-44BE-B98F-5917D70390D6}"/>
+              </a:ext>
+            </a:extLst>
+          </p:cNvPr>
+          <p:cNvSpPr>
+            <a:spLocks xmlns:a="http://schemas.openxmlformats.org/drawingml/2006/main" noGrp="1"/>
+          </p:cNvSpPr>
+          <p:nvPr/>
+        </p:nvSpPr>
+        <p:spPr>
+          <a:xfrm xmlns:a="http://schemas.openxmlformats.org/drawingml/2006/main">
+            <a:off x="1162050" y="3952875"/>
+            <a:ext cx="400050" cy="400050"/>
           </a:xfrm>
           <a:prstGeom xmlns:a="http://schemas.openxmlformats.org/drawingml/2006/main" prst="rect">
             <a:avLst/>
@@ -8614,9 +8620,9 @@
           <a:lstStyle xmlns:a="http://schemas.openxmlformats.org/drawingml/2006/main"/>
           <a:p xmlns:a="http://schemas.openxmlformats.org/drawingml/2006/main">
             <a:pPr algn="ctr">
-              <a:defRPr sz="1350" b="1">
-                <a:solidFill>
-                  <a:srgbClr val="FFFFFF"/>
+              <a:defRPr sz="1125" b="1">
+                <a:solidFill>
+                  <a:srgbClr val="2C6E73"/>
                 </a:solidFill>
                 <a:latin typeface="Arial"/>
                 <a:ea typeface="Arial"/>
@@ -8624,9 +8630,9 @@
               </a:defRPr>
             </a:pPr>
             <a:r>
-              <a:rPr sz="1350" b="1">
-                <a:solidFill>
-                  <a:srgbClr val="FFFFFF"/>
+              <a:rPr sz="1125" b="1">
+                <a:solidFill>
+                  <a:srgbClr val="2C6E73"/>
                 </a:solidFill>
                 <a:latin typeface="Arial"/>
                 <a:ea typeface="Arial"/>
@@ -8642,19 +8648,19 @@
           <p:cNvPr id="19" name="">
             <a:extLst xmlns:a="http://schemas.openxmlformats.org/drawingml/2006/main">
               <a:ext uri="{FF2B5EF4-FFF2-40B4-BE49-F238E27FC236}">
-                <a16:creationId xmlns:a16="http://schemas.microsoft.com/office/drawing/2014/main" id="{1AB5F8F3-64F2-4266-AF0D-6ADE89C3DF6B}"/>
-              </a:ext>
-            </a:extLst>
-          </p:cNvPr>
-          <p:cNvSpPr>
-            <a:spLocks xmlns:a="http://schemas.openxmlformats.org/drawingml/2006/main" noGrp="1"/>
-          </p:cNvSpPr>
-          <p:nvPr/>
-        </p:nvSpPr>
-        <p:spPr>
-          <a:xfrm xmlns:a="http://schemas.openxmlformats.org/drawingml/2006/main">
-            <a:off x="1714500" y="3667125"/>
-            <a:ext cx="9429750" cy="609600"/>
+                <a16:creationId xmlns:a16="http://schemas.microsoft.com/office/drawing/2014/main" id="{8032EE58-6285-4A0D-9FAF-B59BF37C3657}"/>
+              </a:ext>
+            </a:extLst>
+          </p:cNvPr>
+          <p:cNvSpPr>
+            <a:spLocks xmlns:a="http://schemas.openxmlformats.org/drawingml/2006/main" noGrp="1"/>
+          </p:cNvSpPr>
+          <p:nvPr/>
+        </p:nvSpPr>
+        <p:spPr>
+          <a:xfrm xmlns:a="http://schemas.openxmlformats.org/drawingml/2006/main">
+            <a:off x="1714500" y="3867150"/>
+            <a:ext cx="9525000" cy="809625"/>
           </a:xfrm>
           <a:prstGeom xmlns:a="http://schemas.openxmlformats.org/drawingml/2006/main" prst="rect">
             <a:avLst/>
@@ -8671,7 +8677,7 @@
           <a:lstStyle xmlns:a="http://schemas.openxmlformats.org/drawingml/2006/main"/>
           <a:p xmlns:a="http://schemas.openxmlformats.org/drawingml/2006/main">
             <a:pPr algn="l">
-              <a:defRPr sz="1500" b="0">
+              <a:defRPr sz="1725" b="0">
                 <a:solidFill>
                   <a:srgbClr val="17253A"/>
                 </a:solidFill>
@@ -8681,7 +8687,7 @@
               </a:defRPr>
             </a:pPr>
             <a:r>
-              <a:rPr sz="1500" b="0">
+              <a:rPr sz="1725" b="0">
                 <a:solidFill>
                   <a:srgbClr val="17253A"/>
                 </a:solidFill>
@@ -8689,7 +8695,7 @@
                 <a:ea typeface="Arial"/>
                 <a:cs typeface="Arial"/>
               </a:rPr>
-              <a:t>Complete the calculation: 3/20.</a:t>
+              <a:t>Denominators: 4 × 5 = 20</a:t>
             </a:r>
           </a:p>
         </p:txBody>
@@ -8699,28 +8705,30 @@
           <p:cNvPr id="20" name="">
             <a:extLst xmlns:a="http://schemas.openxmlformats.org/drawingml/2006/main">
               <a:ext uri="{FF2B5EF4-FFF2-40B4-BE49-F238E27FC236}">
-                <a16:creationId xmlns:a16="http://schemas.microsoft.com/office/drawing/2014/main" id="{188BF8D4-4A9A-48AB-B22B-C83C666871E9}"/>
-              </a:ext>
-            </a:extLst>
-          </p:cNvPr>
-          <p:cNvSpPr>
-            <a:spLocks xmlns:a="http://schemas.openxmlformats.org/drawingml/2006/main" noGrp="1"/>
-          </p:cNvSpPr>
-          <p:nvPr/>
-        </p:nvSpPr>
-        <p:spPr>
-          <a:xfrm xmlns:a="http://schemas.openxmlformats.org/drawingml/2006/main">
-            <a:off x="1000125" y="4476750"/>
-            <a:ext cx="476250" cy="476250"/>
-          </a:xfrm>
-          <a:prstGeom xmlns:a="http://schemas.openxmlformats.org/drawingml/2006/main" prst="ellipse">
+                <a16:creationId xmlns:a16="http://schemas.microsoft.com/office/drawing/2014/main" id="{CEC1E727-FBE6-4D81-A06D-3574D950712E}"/>
+              </a:ext>
+            </a:extLst>
+          </p:cNvPr>
+          <p:cNvSpPr>
+            <a:spLocks xmlns:a="http://schemas.openxmlformats.org/drawingml/2006/main" noGrp="1"/>
+          </p:cNvSpPr>
+          <p:nvPr/>
+        </p:nvSpPr>
+        <p:spPr>
+          <a:xfrm xmlns:a="http://schemas.openxmlformats.org/drawingml/2006/main">
+            <a:off x="1714500" y="4695825"/>
+            <a:ext cx="9334500" cy="9525"/>
+          </a:xfrm>
+          <a:prstGeom xmlns:a="http://schemas.openxmlformats.org/drawingml/2006/main" prst="rect">
             <a:avLst/>
           </a:prstGeom>
           <a:solidFill xmlns:a="http://schemas.openxmlformats.org/drawingml/2006/main">
-            <a:srgbClr val="2C6E73"/>
+            <a:srgbClr val="D9E0E6"/>
           </a:solidFill>
           <a:ln xmlns:a="http://schemas.openxmlformats.org/drawingml/2006/main" w="0">
-            <a:noFill/>
+            <a:solidFill>
+              <a:srgbClr val="D9E0E6"/>
+            </a:solidFill>
           </a:ln>
         </p:spPr>
       </p:sp>
@@ -8729,19 +8737,19 @@
           <p:cNvPr id="21" name="">
             <a:extLst xmlns:a="http://schemas.openxmlformats.org/drawingml/2006/main">
               <a:ext uri="{FF2B5EF4-FFF2-40B4-BE49-F238E27FC236}">
-                <a16:creationId xmlns:a16="http://schemas.microsoft.com/office/drawing/2014/main" id="{88BF7EA0-BD41-4791-BDC5-B06A9284BAF3}"/>
-              </a:ext>
-            </a:extLst>
-          </p:cNvPr>
-          <p:cNvSpPr>
-            <a:spLocks xmlns:a="http://schemas.openxmlformats.org/drawingml/2006/main" noGrp="1"/>
-          </p:cNvSpPr>
-          <p:nvPr/>
-        </p:nvSpPr>
-        <p:spPr>
-          <a:xfrm xmlns:a="http://schemas.openxmlformats.org/drawingml/2006/main">
-            <a:off x="1000125" y="4505325"/>
-            <a:ext cx="476250" cy="419100"/>
+                <a16:creationId xmlns:a16="http://schemas.microsoft.com/office/drawing/2014/main" id="{3CB6FABE-45D4-4420-BDBB-96C9C6610021}"/>
+              </a:ext>
+            </a:extLst>
+          </p:cNvPr>
+          <p:cNvSpPr>
+            <a:spLocks xmlns:a="http://schemas.openxmlformats.org/drawingml/2006/main" noGrp="1"/>
+          </p:cNvSpPr>
+          <p:nvPr/>
+        </p:nvSpPr>
+        <p:spPr>
+          <a:xfrm xmlns:a="http://schemas.openxmlformats.org/drawingml/2006/main">
+            <a:off x="1162050" y="4829175"/>
+            <a:ext cx="400050" cy="400050"/>
           </a:xfrm>
           <a:prstGeom xmlns:a="http://schemas.openxmlformats.org/drawingml/2006/main" prst="rect">
             <a:avLst/>
@@ -8758,9 +8766,9 @@
           <a:lstStyle xmlns:a="http://schemas.openxmlformats.org/drawingml/2006/main"/>
           <a:p xmlns:a="http://schemas.openxmlformats.org/drawingml/2006/main">
             <a:pPr algn="ctr">
-              <a:defRPr sz="1350" b="1">
-                <a:solidFill>
-                  <a:srgbClr val="FFFFFF"/>
+              <a:defRPr sz="1125" b="1">
+                <a:solidFill>
+                  <a:srgbClr val="2F785D"/>
                 </a:solidFill>
                 <a:latin typeface="Arial"/>
                 <a:ea typeface="Arial"/>
@@ -8768,9 +8776,9 @@
               </a:defRPr>
             </a:pPr>
             <a:r>
-              <a:rPr sz="1350" b="1">
-                <a:solidFill>
-                  <a:srgbClr val="FFFFFF"/>
+              <a:rPr sz="1125" b="1">
+                <a:solidFill>
+                  <a:srgbClr val="2F785D"/>
                 </a:solidFill>
                 <a:latin typeface="Arial"/>
                 <a:ea typeface="Arial"/>
@@ -8786,19 +8794,19 @@
           <p:cNvPr id="22" name="">
             <a:extLst xmlns:a="http://schemas.openxmlformats.org/drawingml/2006/main">
               <a:ext uri="{FF2B5EF4-FFF2-40B4-BE49-F238E27FC236}">
-                <a16:creationId xmlns:a16="http://schemas.microsoft.com/office/drawing/2014/main" id="{C289EC02-D1A9-4C00-B3C7-9F4F1B072C76}"/>
-              </a:ext>
-            </a:extLst>
-          </p:cNvPr>
-          <p:cNvSpPr>
-            <a:spLocks xmlns:a="http://schemas.openxmlformats.org/drawingml/2006/main" noGrp="1"/>
-          </p:cNvSpPr>
-          <p:nvPr/>
-        </p:nvSpPr>
-        <p:spPr>
-          <a:xfrm xmlns:a="http://schemas.openxmlformats.org/drawingml/2006/main">
-            <a:off x="1714500" y="4410075"/>
-            <a:ext cx="9429750" cy="609600"/>
+                <a16:creationId xmlns:a16="http://schemas.microsoft.com/office/drawing/2014/main" id="{C701A0B2-EABA-4CFA-A488-6EE5DA616719}"/>
+              </a:ext>
+            </a:extLst>
+          </p:cNvPr>
+          <p:cNvSpPr>
+            <a:spLocks xmlns:a="http://schemas.openxmlformats.org/drawingml/2006/main" noGrp="1"/>
+          </p:cNvSpPr>
+          <p:nvPr/>
+        </p:nvSpPr>
+        <p:spPr>
+          <a:xfrm xmlns:a="http://schemas.openxmlformats.org/drawingml/2006/main">
+            <a:off x="1714500" y="4743450"/>
+            <a:ext cx="9525000" cy="809625"/>
           </a:xfrm>
           <a:prstGeom xmlns:a="http://schemas.openxmlformats.org/drawingml/2006/main" prst="rect">
             <a:avLst/>
@@ -8815,7 +8823,7 @@
           <a:lstStyle xmlns:a="http://schemas.openxmlformats.org/drawingml/2006/main"/>
           <a:p xmlns:a="http://schemas.openxmlformats.org/drawingml/2006/main">
             <a:pPr algn="l">
-              <a:defRPr sz="1500" b="1">
+              <a:defRPr sz="1725" b="1">
                 <a:solidFill>
                   <a:srgbClr val="2F785D"/>
                 </a:solidFill>
@@ -8825,7 +8833,7 @@
               </a:defRPr>
             </a:pPr>
             <a:r>
-              <a:rPr sz="1500" b="1">
+              <a:rPr sz="1725" b="1">
                 <a:solidFill>
                   <a:srgbClr val="2F785D"/>
                 </a:solidFill>
@@ -8833,7 +8841,7 @@
                 <a:ea typeface="Arial"/>
                 <a:cs typeface="Arial"/>
               </a:rPr>
-              <a:t>Check the result: Simplify the product and check its size.</a:t>
+              <a:t>1/4 × 3/5 = 3/20</a:t>
             </a:r>
           </a:p>
         </p:txBody>
@@ -8841,7 +8849,7 @@
     </p:spTree>
     <p:extLst>
       <p:ext uri="{BB962C8B-B14F-4D97-AF65-F5344CB8AC3E}">
-        <p14:creationId xmlns:p14="http://schemas.microsoft.com/office/powerpoint/2010/main" val="438354146"/>
+        <p14:creationId xmlns:p14="http://schemas.microsoft.com/office/powerpoint/2010/main" val="2098133312"/>
       </p:ext>
     </p:extLst>
   </p:cSld>
@@ -9134,7 +9142,7 @@
           <p:cNvPr id="15" name="">
             <a:extLst xmlns:a="http://schemas.openxmlformats.org/drawingml/2006/main">
               <a:ext uri="{FF2B5EF4-FFF2-40B4-BE49-F238E27FC236}">
-                <a16:creationId xmlns:a16="http://schemas.microsoft.com/office/drawing/2014/main" id="{FFF61F10-DB56-4EC9-8575-7440C7B3BF90}"/>
+                <a16:creationId xmlns:a16="http://schemas.microsoft.com/office/drawing/2014/main" id="{8369FBAA-5534-4765-BE4D-4BE0C75DF87C}"/>
               </a:ext>
             </a:extLst>
           </p:cNvPr>
@@ -9166,7 +9174,7 @@
           <p:cNvPr id="2" name="">
             <a:extLst xmlns:a="http://schemas.openxmlformats.org/drawingml/2006/main">
               <a:ext uri="{FF2B5EF4-FFF2-40B4-BE49-F238E27FC236}">
-                <a16:creationId xmlns:a16="http://schemas.microsoft.com/office/drawing/2014/main" id="{3BE47839-5739-44AC-9E86-EAA485C1562C}"/>
+                <a16:creationId xmlns:a16="http://schemas.microsoft.com/office/drawing/2014/main" id="{8163E652-83D1-411E-A33A-B70A62DC4C7B}"/>
               </a:ext>
             </a:extLst>
           </p:cNvPr>
@@ -9223,7 +9231,7 @@
           <p:cNvPr id="3" name="">
             <a:extLst xmlns:a="http://schemas.openxmlformats.org/drawingml/2006/main">
               <a:ext uri="{FF2B5EF4-FFF2-40B4-BE49-F238E27FC236}">
-                <a16:creationId xmlns:a16="http://schemas.microsoft.com/office/drawing/2014/main" id="{2D5B1041-4065-4CE6-B312-B2F87645188A}"/>
+                <a16:creationId xmlns:a16="http://schemas.microsoft.com/office/drawing/2014/main" id="{C2BEAB81-9E68-4BD7-B859-1D2AD9385894}"/>
               </a:ext>
             </a:extLst>
           </p:cNvPr>
@@ -9255,7 +9263,7 @@
           <p:cNvPr id="4" name="">
             <a:extLst xmlns:a="http://schemas.openxmlformats.org/drawingml/2006/main">
               <a:ext uri="{FF2B5EF4-FFF2-40B4-BE49-F238E27FC236}">
-                <a16:creationId xmlns:a16="http://schemas.microsoft.com/office/drawing/2014/main" id="{862CF165-EBBE-4487-BB11-421B3C5107AF}"/>
+                <a16:creationId xmlns:a16="http://schemas.microsoft.com/office/drawing/2014/main" id="{9F1843CC-3016-421B-A496-0BF921D1F4E4}"/>
               </a:ext>
             </a:extLst>
           </p:cNvPr>
@@ -9312,7 +9320,7 @@
           <p:cNvPr id="5" name="">
             <a:extLst xmlns:a="http://schemas.openxmlformats.org/drawingml/2006/main">
               <a:ext uri="{FF2B5EF4-FFF2-40B4-BE49-F238E27FC236}">
-                <a16:creationId xmlns:a16="http://schemas.microsoft.com/office/drawing/2014/main" id="{B48337F7-A94E-4242-A71B-01A2BFE4AB90}"/>
+                <a16:creationId xmlns:a16="http://schemas.microsoft.com/office/drawing/2014/main" id="{4C56616A-921A-41AD-9302-684B0D424074}"/>
               </a:ext>
             </a:extLst>
           </p:cNvPr>
@@ -9369,7 +9377,7 @@
           <p:cNvPr id="6" name="">
             <a:extLst xmlns:a="http://schemas.openxmlformats.org/drawingml/2006/main">
               <a:ext uri="{FF2B5EF4-FFF2-40B4-BE49-F238E27FC236}">
-                <a16:creationId xmlns:a16="http://schemas.microsoft.com/office/drawing/2014/main" id="{E175CDE0-25CA-465F-87EE-E30FDF5B61A5}"/>
+                <a16:creationId xmlns:a16="http://schemas.microsoft.com/office/drawing/2014/main" id="{F33E2529-6418-4295-81E5-E8B0C519247B}"/>
               </a:ext>
             </a:extLst>
           </p:cNvPr>
@@ -9426,7 +9434,7 @@
           <p:cNvPr id="7" name="">
             <a:extLst xmlns:a="http://schemas.openxmlformats.org/drawingml/2006/main">
               <a:ext uri="{FF2B5EF4-FFF2-40B4-BE49-F238E27FC236}">
-                <a16:creationId xmlns:a16="http://schemas.microsoft.com/office/drawing/2014/main" id="{05AB4185-C9A8-488B-B2DC-70E1158290A3}"/>
+                <a16:creationId xmlns:a16="http://schemas.microsoft.com/office/drawing/2014/main" id="{793343CC-4CE4-4432-91FC-945255A5C46A}"/>
               </a:ext>
             </a:extLst>
           </p:cNvPr>
@@ -9458,7 +9466,7 @@
           <p:cNvPr id="8" name="">
             <a:extLst xmlns:a="http://schemas.openxmlformats.org/drawingml/2006/main">
               <a:ext uri="{FF2B5EF4-FFF2-40B4-BE49-F238E27FC236}">
-                <a16:creationId xmlns:a16="http://schemas.microsoft.com/office/drawing/2014/main" id="{5846DFEE-800A-46DF-BB7E-6E2A50872E1B}"/>
+                <a16:creationId xmlns:a16="http://schemas.microsoft.com/office/drawing/2014/main" id="{93DD7317-266B-4827-B600-7E25AF5F7928}"/>
               </a:ext>
             </a:extLst>
           </p:cNvPr>
@@ -9515,7 +9523,7 @@
           <p:cNvPr id="9" name="">
             <a:extLst xmlns:a="http://schemas.openxmlformats.org/drawingml/2006/main">
               <a:ext uri="{FF2B5EF4-FFF2-40B4-BE49-F238E27FC236}">
-                <a16:creationId xmlns:a16="http://schemas.microsoft.com/office/drawing/2014/main" id="{7B91793C-17AD-4916-B628-9D11223FC81D}"/>
+                <a16:creationId xmlns:a16="http://schemas.microsoft.com/office/drawing/2014/main" id="{E63A633C-A891-485F-888D-224174B6235A}"/>
               </a:ext>
             </a:extLst>
           </p:cNvPr>
@@ -9572,7 +9580,7 @@
           <p:cNvPr id="10" name="">
             <a:extLst xmlns:a="http://schemas.openxmlformats.org/drawingml/2006/main">
               <a:ext uri="{FF2B5EF4-FFF2-40B4-BE49-F238E27FC236}">
-                <a16:creationId xmlns:a16="http://schemas.microsoft.com/office/drawing/2014/main" id="{7540FFD2-58C4-42F7-98C3-2192FE3A3ED6}"/>
+                <a16:creationId xmlns:a16="http://schemas.microsoft.com/office/drawing/2014/main" id="{660ABF49-CEDE-4771-8115-2782B21EB356}"/>
               </a:ext>
             </a:extLst>
           </p:cNvPr>
@@ -9629,7 +9637,7 @@
           <p:cNvPr id="11" name="">
             <a:extLst xmlns:a="http://schemas.openxmlformats.org/drawingml/2006/main">
               <a:ext uri="{FF2B5EF4-FFF2-40B4-BE49-F238E27FC236}">
-                <a16:creationId xmlns:a16="http://schemas.microsoft.com/office/drawing/2014/main" id="{8422CCC0-1803-4871-A5A3-F8A32CDF2657}"/>
+                <a16:creationId xmlns:a16="http://schemas.microsoft.com/office/drawing/2014/main" id="{A7538E88-4BF6-4268-B69E-4774C311B9F6}"/>
               </a:ext>
             </a:extLst>
           </p:cNvPr>
@@ -9686,7 +9694,7 @@
           <p:cNvPr id="12" name="">
             <a:extLst xmlns:a="http://schemas.openxmlformats.org/drawingml/2006/main">
               <a:ext uri="{FF2B5EF4-FFF2-40B4-BE49-F238E27FC236}">
-                <a16:creationId xmlns:a16="http://schemas.microsoft.com/office/drawing/2014/main" id="{656FB2A8-9945-4F6C-9EA8-63DF53A89760}"/>
+                <a16:creationId xmlns:a16="http://schemas.microsoft.com/office/drawing/2014/main" id="{B8684614-9832-4F62-882B-692BDF271048}"/>
               </a:ext>
             </a:extLst>
           </p:cNvPr>
@@ -9718,7 +9726,7 @@
           <p:cNvPr id="13" name="">
             <a:extLst xmlns:a="http://schemas.openxmlformats.org/drawingml/2006/main">
               <a:ext uri="{FF2B5EF4-FFF2-40B4-BE49-F238E27FC236}">
-                <a16:creationId xmlns:a16="http://schemas.microsoft.com/office/drawing/2014/main" id="{AC1043D7-43BF-40E3-A989-2F8C03B0EFE5}"/>
+                <a16:creationId xmlns:a16="http://schemas.microsoft.com/office/drawing/2014/main" id="{A24071A9-8453-41AC-852D-DD85C45EF17C}"/>
               </a:ext>
             </a:extLst>
           </p:cNvPr>
@@ -9775,7 +9783,7 @@
           <p:cNvPr id="14" name="">
             <a:extLst xmlns:a="http://schemas.openxmlformats.org/drawingml/2006/main">
               <a:ext uri="{FF2B5EF4-FFF2-40B4-BE49-F238E27FC236}">
-                <a16:creationId xmlns:a16="http://schemas.microsoft.com/office/drawing/2014/main" id="{5918DC82-D71A-4B02-9061-B47533B8416B}"/>
+                <a16:creationId xmlns:a16="http://schemas.microsoft.com/office/drawing/2014/main" id="{E727ACCB-84E8-468A-B289-DF0A197C4033}"/>
               </a:ext>
             </a:extLst>
           </p:cNvPr>
@@ -9830,7 +9838,7 @@
     </p:spTree>
     <p:extLst>
       <p:ext uri="{BB962C8B-B14F-4D97-AF65-F5344CB8AC3E}">
-        <p14:creationId xmlns:p14="http://schemas.microsoft.com/office/powerpoint/2010/main" val="1242202523"/>
+        <p14:creationId xmlns:p14="http://schemas.microsoft.com/office/powerpoint/2010/main" val="502979486"/>
       </p:ext>
     </p:extLst>
   </p:cSld>
@@ -10031,7 +10039,7 @@
           <p:cNvPr id="16" name="">
             <a:extLst xmlns:a="http://schemas.openxmlformats.org/drawingml/2006/main">
               <a:ext uri="{FF2B5EF4-FFF2-40B4-BE49-F238E27FC236}">
-                <a16:creationId xmlns:a16="http://schemas.microsoft.com/office/drawing/2014/main" id="{385DE39F-CAF0-4287-9C28-92861936EF9F}"/>
+                <a16:creationId xmlns:a16="http://schemas.microsoft.com/office/drawing/2014/main" id="{3E0FD590-801F-4CD8-9DF1-FABCE7782E9A}"/>
               </a:ext>
             </a:extLst>
           </p:cNvPr>
@@ -10063,7 +10071,7 @@
           <p:cNvPr id="2" name="">
             <a:extLst xmlns:a="http://schemas.openxmlformats.org/drawingml/2006/main">
               <a:ext uri="{FF2B5EF4-FFF2-40B4-BE49-F238E27FC236}">
-                <a16:creationId xmlns:a16="http://schemas.microsoft.com/office/drawing/2014/main" id="{12BD6CA5-E0E0-4F27-B8D9-0AFC7DFBD819}"/>
+                <a16:creationId xmlns:a16="http://schemas.microsoft.com/office/drawing/2014/main" id="{EB411404-D3F1-469C-AA6A-8B5087DA4B95}"/>
               </a:ext>
             </a:extLst>
           </p:cNvPr>
@@ -10120,7 +10128,7 @@
           <p:cNvPr id="3" name="">
             <a:extLst xmlns:a="http://schemas.openxmlformats.org/drawingml/2006/main">
               <a:ext uri="{FF2B5EF4-FFF2-40B4-BE49-F238E27FC236}">
-                <a16:creationId xmlns:a16="http://schemas.microsoft.com/office/drawing/2014/main" id="{6ACD7CE4-738F-49FA-9693-71EE490BE065}"/>
+                <a16:creationId xmlns:a16="http://schemas.microsoft.com/office/drawing/2014/main" id="{BFEA99CE-EDCF-4A82-9490-9A31E764417F}"/>
               </a:ext>
             </a:extLst>
           </p:cNvPr>
@@ -10152,7 +10160,7 @@
           <p:cNvPr id="4" name="">
             <a:extLst xmlns:a="http://schemas.openxmlformats.org/drawingml/2006/main">
               <a:ext uri="{FF2B5EF4-FFF2-40B4-BE49-F238E27FC236}">
-                <a16:creationId xmlns:a16="http://schemas.microsoft.com/office/drawing/2014/main" id="{C61BC3EB-42F7-41C9-B6E0-10523C4BCE23}"/>
+                <a16:creationId xmlns:a16="http://schemas.microsoft.com/office/drawing/2014/main" id="{F3A624C4-992B-4716-BAD0-66CD7E6EB8FE}"/>
               </a:ext>
             </a:extLst>
           </p:cNvPr>
@@ -10209,7 +10217,7 @@
           <p:cNvPr id="5" name="">
             <a:extLst xmlns:a="http://schemas.openxmlformats.org/drawingml/2006/main">
               <a:ext uri="{FF2B5EF4-FFF2-40B4-BE49-F238E27FC236}">
-                <a16:creationId xmlns:a16="http://schemas.microsoft.com/office/drawing/2014/main" id="{2844B20D-CF7D-4AF9-91D8-93F6BC7C083C}"/>
+                <a16:creationId xmlns:a16="http://schemas.microsoft.com/office/drawing/2014/main" id="{E7BF490F-C54A-439C-B58F-B3A8BEDE7AC5}"/>
               </a:ext>
             </a:extLst>
           </p:cNvPr>
@@ -10266,7 +10274,7 @@
           <p:cNvPr id="6" name="">
             <a:extLst xmlns:a="http://schemas.openxmlformats.org/drawingml/2006/main">
               <a:ext uri="{FF2B5EF4-FFF2-40B4-BE49-F238E27FC236}">
-                <a16:creationId xmlns:a16="http://schemas.microsoft.com/office/drawing/2014/main" id="{8F4B7539-7FA2-45F8-9B6E-20E16180D644}"/>
+                <a16:creationId xmlns:a16="http://schemas.microsoft.com/office/drawing/2014/main" id="{8FF258C7-DD3A-41CF-BEF6-4A8DDAE0021F}"/>
               </a:ext>
             </a:extLst>
           </p:cNvPr>
@@ -10323,7 +10331,7 @@
           <p:cNvPr id="7" name="">
             <a:extLst xmlns:a="http://schemas.openxmlformats.org/drawingml/2006/main">
               <a:ext uri="{FF2B5EF4-FFF2-40B4-BE49-F238E27FC236}">
-                <a16:creationId xmlns:a16="http://schemas.microsoft.com/office/drawing/2014/main" id="{3CBFF285-24DC-4B02-8822-54FFD80ADF14}"/>
+                <a16:creationId xmlns:a16="http://schemas.microsoft.com/office/drawing/2014/main" id="{E88848BE-69AA-42FA-863E-339B49A2D754}"/>
               </a:ext>
             </a:extLst>
           </p:cNvPr>
@@ -10355,7 +10363,7 @@
           <p:cNvPr id="8" name="">
             <a:extLst xmlns:a="http://schemas.openxmlformats.org/drawingml/2006/main">
               <a:ext uri="{FF2B5EF4-FFF2-40B4-BE49-F238E27FC236}">
-                <a16:creationId xmlns:a16="http://schemas.microsoft.com/office/drawing/2014/main" id="{CD2317ED-550C-4E87-8F8B-A76EA40E6240}"/>
+                <a16:creationId xmlns:a16="http://schemas.microsoft.com/office/drawing/2014/main" id="{9D15E45B-6FBD-4291-B4FD-59E8092FE276}"/>
               </a:ext>
             </a:extLst>
           </p:cNvPr>
@@ -10412,7 +10420,7 @@
           <p:cNvPr id="9" name="">
             <a:extLst xmlns:a="http://schemas.openxmlformats.org/drawingml/2006/main">
               <a:ext uri="{FF2B5EF4-FFF2-40B4-BE49-F238E27FC236}">
-                <a16:creationId xmlns:a16="http://schemas.microsoft.com/office/drawing/2014/main" id="{9270C8CD-6C9D-44B8-B352-89B6BDA5FA1F}"/>
+                <a16:creationId xmlns:a16="http://schemas.microsoft.com/office/drawing/2014/main" id="{B16875A0-5FAC-4C7D-934C-1A11C65A0398}"/>
               </a:ext>
             </a:extLst>
           </p:cNvPr>
@@ -10469,7 +10477,7 @@
           <p:cNvPr id="10" name="">
             <a:extLst xmlns:a="http://schemas.openxmlformats.org/drawingml/2006/main">
               <a:ext uri="{FF2B5EF4-FFF2-40B4-BE49-F238E27FC236}">
-                <a16:creationId xmlns:a16="http://schemas.microsoft.com/office/drawing/2014/main" id="{93C1A7AF-7164-429A-B4D5-C416160B9F39}"/>
+                <a16:creationId xmlns:a16="http://schemas.microsoft.com/office/drawing/2014/main" id="{7A011916-B9D5-40BF-95B8-48EE6AE3F529}"/>
               </a:ext>
             </a:extLst>
           </p:cNvPr>
@@ -10526,7 +10534,7 @@
           <p:cNvPr id="11" name="">
             <a:extLst xmlns:a="http://schemas.openxmlformats.org/drawingml/2006/main">
               <a:ext uri="{FF2B5EF4-FFF2-40B4-BE49-F238E27FC236}">
-                <a16:creationId xmlns:a16="http://schemas.microsoft.com/office/drawing/2014/main" id="{F1466877-6DA9-4D59-A3E6-97C133F4BDAB}"/>
+                <a16:creationId xmlns:a16="http://schemas.microsoft.com/office/drawing/2014/main" id="{AD825851-3E6B-45AB-B36C-0E7A814429A1}"/>
               </a:ext>
             </a:extLst>
           </p:cNvPr>
@@ -10583,7 +10591,7 @@
           <p:cNvPr id="12" name="">
             <a:extLst xmlns:a="http://schemas.openxmlformats.org/drawingml/2006/main">
               <a:ext uri="{FF2B5EF4-FFF2-40B4-BE49-F238E27FC236}">
-                <a16:creationId xmlns:a16="http://schemas.microsoft.com/office/drawing/2014/main" id="{4A21099B-E1C3-4E3E-9B63-0ECA4CB03FEC}"/>
+                <a16:creationId xmlns:a16="http://schemas.microsoft.com/office/drawing/2014/main" id="{FADE39C7-5240-43EA-9CA3-CD5D4DF64368}"/>
               </a:ext>
             </a:extLst>
           </p:cNvPr>
@@ -10640,7 +10648,7 @@
           <p:cNvPr id="13" name="">
             <a:extLst xmlns:a="http://schemas.openxmlformats.org/drawingml/2006/main">
               <a:ext uri="{FF2B5EF4-FFF2-40B4-BE49-F238E27FC236}">
-                <a16:creationId xmlns:a16="http://schemas.microsoft.com/office/drawing/2014/main" id="{36A9E716-F0CD-405D-A6FA-E009D4F22CDC}"/>
+                <a16:creationId xmlns:a16="http://schemas.microsoft.com/office/drawing/2014/main" id="{0985AC1E-0DF8-492B-9F62-6CF1C529508B}"/>
               </a:ext>
             </a:extLst>
           </p:cNvPr>
@@ -10697,7 +10705,7 @@
           <p:cNvPr id="14" name="">
             <a:extLst xmlns:a="http://schemas.openxmlformats.org/drawingml/2006/main">
               <a:ext uri="{FF2B5EF4-FFF2-40B4-BE49-F238E27FC236}">
-                <a16:creationId xmlns:a16="http://schemas.microsoft.com/office/drawing/2014/main" id="{2BB710AC-16ED-4064-81C6-7112AA87AB36}"/>
+                <a16:creationId xmlns:a16="http://schemas.microsoft.com/office/drawing/2014/main" id="{83540E6B-ECA3-4E17-9AF4-9E485EE9BDF5}"/>
               </a:ext>
             </a:extLst>
           </p:cNvPr>
@@ -10754,7 +10762,7 @@
           <p:cNvPr id="15" name="">
             <a:extLst xmlns:a="http://schemas.openxmlformats.org/drawingml/2006/main">
               <a:ext uri="{FF2B5EF4-FFF2-40B4-BE49-F238E27FC236}">
-                <a16:creationId xmlns:a16="http://schemas.microsoft.com/office/drawing/2014/main" id="{55F4E1BD-1E05-4AB9-A1A7-E08A1B006E6E}"/>
+                <a16:creationId xmlns:a16="http://schemas.microsoft.com/office/drawing/2014/main" id="{397C3FC5-FFB7-42F4-9720-71A57C86A5E1}"/>
               </a:ext>
             </a:extLst>
           </p:cNvPr>
@@ -10809,7 +10817,7 @@
     </p:spTree>
     <p:extLst>
       <p:ext uri="{BB962C8B-B14F-4D97-AF65-F5344CB8AC3E}">
-        <p14:creationId xmlns:p14="http://schemas.microsoft.com/office/powerpoint/2010/main" val="1148999720"/>
+        <p14:creationId xmlns:p14="http://schemas.microsoft.com/office/powerpoint/2010/main" val="187566551"/>
       </p:ext>
     </p:extLst>
   </p:cSld>
@@ -10964,7 +10972,7 @@
           <p:cNvPr id="16" name="">
             <a:extLst xmlns:a="http://schemas.openxmlformats.org/drawingml/2006/main">
               <a:ext uri="{FF2B5EF4-FFF2-40B4-BE49-F238E27FC236}">
-                <a16:creationId xmlns:a16="http://schemas.microsoft.com/office/drawing/2014/main" id="{4C1E008F-1AD4-45EA-AA13-A0227619BE2C}"/>
+                <a16:creationId xmlns:a16="http://schemas.microsoft.com/office/drawing/2014/main" id="{167950FC-49B0-41BA-9EB8-4ED53C9AC919}"/>
               </a:ext>
             </a:extLst>
           </p:cNvPr>
@@ -10996,7 +11004,7 @@
           <p:cNvPr id="2" name="">
             <a:extLst xmlns:a="http://schemas.openxmlformats.org/drawingml/2006/main">
               <a:ext uri="{FF2B5EF4-FFF2-40B4-BE49-F238E27FC236}">
-                <a16:creationId xmlns:a16="http://schemas.microsoft.com/office/drawing/2014/main" id="{ED2E0F16-4AD0-4A45-B01A-ACC5DDBE91E8}"/>
+                <a16:creationId xmlns:a16="http://schemas.microsoft.com/office/drawing/2014/main" id="{366B633B-0F22-4A54-92B5-94DA3A12E3CD}"/>
               </a:ext>
             </a:extLst>
           </p:cNvPr>
@@ -11053,7 +11061,7 @@
           <p:cNvPr id="3" name="">
             <a:extLst xmlns:a="http://schemas.openxmlformats.org/drawingml/2006/main">
               <a:ext uri="{FF2B5EF4-FFF2-40B4-BE49-F238E27FC236}">
-                <a16:creationId xmlns:a16="http://schemas.microsoft.com/office/drawing/2014/main" id="{9BF801F0-38D8-47C5-8F8C-CC81693AAF40}"/>
+                <a16:creationId xmlns:a16="http://schemas.microsoft.com/office/drawing/2014/main" id="{2CE3FE0D-3A35-432C-A3B8-44EF252137AA}"/>
               </a:ext>
             </a:extLst>
           </p:cNvPr>
@@ -11085,7 +11093,7 @@
           <p:cNvPr id="4" name="">
             <a:extLst xmlns:a="http://schemas.openxmlformats.org/drawingml/2006/main">
               <a:ext uri="{FF2B5EF4-FFF2-40B4-BE49-F238E27FC236}">
-                <a16:creationId xmlns:a16="http://schemas.microsoft.com/office/drawing/2014/main" id="{5D82A4BE-68EA-4A70-B4DB-FE115B08E1F9}"/>
+                <a16:creationId xmlns:a16="http://schemas.microsoft.com/office/drawing/2014/main" id="{2E49E245-A2C8-448A-BCDC-212F8A9966EC}"/>
               </a:ext>
             </a:extLst>
           </p:cNvPr>
@@ -11142,7 +11150,7 @@
           <p:cNvPr id="5" name="">
             <a:extLst xmlns:a="http://schemas.openxmlformats.org/drawingml/2006/main">
               <a:ext uri="{FF2B5EF4-FFF2-40B4-BE49-F238E27FC236}">
-                <a16:creationId xmlns:a16="http://schemas.microsoft.com/office/drawing/2014/main" id="{737E3A51-D442-4409-AAF6-DC9AC657C463}"/>
+                <a16:creationId xmlns:a16="http://schemas.microsoft.com/office/drawing/2014/main" id="{68D25F5B-E423-47C3-BD49-8BC3BAB80C1B}"/>
               </a:ext>
             </a:extLst>
           </p:cNvPr>
@@ -11199,7 +11207,7 @@
           <p:cNvPr id="6" name="">
             <a:extLst xmlns:a="http://schemas.openxmlformats.org/drawingml/2006/main">
               <a:ext uri="{FF2B5EF4-FFF2-40B4-BE49-F238E27FC236}">
-                <a16:creationId xmlns:a16="http://schemas.microsoft.com/office/drawing/2014/main" id="{F2EC3C90-A8B5-4141-8F12-95D64EDE26BC}"/>
+                <a16:creationId xmlns:a16="http://schemas.microsoft.com/office/drawing/2014/main" id="{F09CF95F-2DE0-46BB-9262-93F3BFD9A1C7}"/>
               </a:ext>
             </a:extLst>
           </p:cNvPr>
@@ -11256,7 +11264,7 @@
           <p:cNvPr id="7" name="">
             <a:extLst xmlns:a="http://schemas.openxmlformats.org/drawingml/2006/main">
               <a:ext uri="{FF2B5EF4-FFF2-40B4-BE49-F238E27FC236}">
-                <a16:creationId xmlns:a16="http://schemas.microsoft.com/office/drawing/2014/main" id="{E0A4E932-3880-4D88-9063-2B06FB786908}"/>
+                <a16:creationId xmlns:a16="http://schemas.microsoft.com/office/drawing/2014/main" id="{49E7BF0A-5D00-4E6A-A78B-43C29C060BE1}"/>
               </a:ext>
             </a:extLst>
           </p:cNvPr>
@@ -11288,7 +11296,7 @@
           <p:cNvPr id="8" name="">
             <a:extLst xmlns:a="http://schemas.openxmlformats.org/drawingml/2006/main">
               <a:ext uri="{FF2B5EF4-FFF2-40B4-BE49-F238E27FC236}">
-                <a16:creationId xmlns:a16="http://schemas.microsoft.com/office/drawing/2014/main" id="{811521AC-9629-4E1A-923F-E1A408480AA7}"/>
+                <a16:creationId xmlns:a16="http://schemas.microsoft.com/office/drawing/2014/main" id="{CE186CFC-E0B1-488A-9C03-5857A8CFE555}"/>
               </a:ext>
             </a:extLst>
           </p:cNvPr>
@@ -11345,7 +11353,7 @@
           <p:cNvPr id="9" name="">
             <a:extLst xmlns:a="http://schemas.openxmlformats.org/drawingml/2006/main">
               <a:ext uri="{FF2B5EF4-FFF2-40B4-BE49-F238E27FC236}">
-                <a16:creationId xmlns:a16="http://schemas.microsoft.com/office/drawing/2014/main" id="{4EBE4796-7D7B-44D5-8F19-0B828297828D}"/>
+                <a16:creationId xmlns:a16="http://schemas.microsoft.com/office/drawing/2014/main" id="{567E381A-5790-4A5B-A537-BA20B42A66F1}"/>
               </a:ext>
             </a:extLst>
           </p:cNvPr>
@@ -11406,7 +11414,7 @@
           <p:nvPr/>
         </p:nvPicPr>
         <p:blipFill>
-          <a:blip xmlns:r="http://schemas.openxmlformats.org/officeDocument/2006/relationships" xmlns:a="http://schemas.openxmlformats.org/drawingml/2006/main" r:embed="Ra2c3598638114215"/>
+          <a:blip xmlns:r="http://schemas.openxmlformats.org/officeDocument/2006/relationships" xmlns:a="http://schemas.openxmlformats.org/drawingml/2006/main" r:embed="R4a89fdaa977a40ea"/>
           <a:stretch xmlns:a="http://schemas.openxmlformats.org/drawingml/2006/main"/>
         </p:blipFill>
         <p:spPr>
@@ -11424,7 +11432,7 @@
           <p:cNvPr id="11" name="">
             <a:extLst xmlns:a="http://schemas.openxmlformats.org/drawingml/2006/main">
               <a:ext uri="{FF2B5EF4-FFF2-40B4-BE49-F238E27FC236}">
-                <a16:creationId xmlns:a16="http://schemas.microsoft.com/office/drawing/2014/main" id="{6D2B3575-1D58-4BAF-B2D9-91ABA90718DF}"/>
+                <a16:creationId xmlns:a16="http://schemas.microsoft.com/office/drawing/2014/main" id="{408495D4-D799-45D7-99F1-95ED81B2D38F}"/>
               </a:ext>
             </a:extLst>
           </p:cNvPr>
@@ -11481,7 +11489,7 @@
           <p:cNvPr id="12" name="">
             <a:extLst xmlns:a="http://schemas.openxmlformats.org/drawingml/2006/main">
               <a:ext uri="{FF2B5EF4-FFF2-40B4-BE49-F238E27FC236}">
-                <a16:creationId xmlns:a16="http://schemas.microsoft.com/office/drawing/2014/main" id="{4E9FCBA6-1BB5-4356-A67E-F2474BF0D187}"/>
+                <a16:creationId xmlns:a16="http://schemas.microsoft.com/office/drawing/2014/main" id="{44564557-3B57-47FB-BF6F-7E0D457ACA6B}"/>
               </a:ext>
             </a:extLst>
           </p:cNvPr>
@@ -11538,7 +11546,7 @@
           <p:cNvPr id="13" name="">
             <a:extLst xmlns:a="http://schemas.openxmlformats.org/drawingml/2006/main">
               <a:ext uri="{FF2B5EF4-FFF2-40B4-BE49-F238E27FC236}">
-                <a16:creationId xmlns:a16="http://schemas.microsoft.com/office/drawing/2014/main" id="{B9362ED6-92EA-4658-B868-6C666CF9B44D}"/>
+                <a16:creationId xmlns:a16="http://schemas.microsoft.com/office/drawing/2014/main" id="{D26679EB-1D34-4D2C-8A5C-C7415885D8B0}"/>
               </a:ext>
             </a:extLst>
           </p:cNvPr>
@@ -11570,7 +11578,7 @@
           <p:cNvPr id="14" name="">
             <a:extLst xmlns:a="http://schemas.openxmlformats.org/drawingml/2006/main">
               <a:ext uri="{FF2B5EF4-FFF2-40B4-BE49-F238E27FC236}">
-                <a16:creationId xmlns:a16="http://schemas.microsoft.com/office/drawing/2014/main" id="{2507822E-D44E-4C2B-877E-C86E4FDB32B5}"/>
+                <a16:creationId xmlns:a16="http://schemas.microsoft.com/office/drawing/2014/main" id="{C065C31E-7773-4194-AE18-3727F0E907F9}"/>
               </a:ext>
             </a:extLst>
           </p:cNvPr>
@@ -11627,7 +11635,7 @@
           <p:cNvPr id="15" name="">
             <a:extLst xmlns:a="http://schemas.openxmlformats.org/drawingml/2006/main">
               <a:ext uri="{FF2B5EF4-FFF2-40B4-BE49-F238E27FC236}">
-                <a16:creationId xmlns:a16="http://schemas.microsoft.com/office/drawing/2014/main" id="{A6547E2C-25F9-43DF-A87D-A3749E6D0467}"/>
+                <a16:creationId xmlns:a16="http://schemas.microsoft.com/office/drawing/2014/main" id="{B8501F31-B5A3-4AAA-B77E-192809D199E9}"/>
               </a:ext>
             </a:extLst>
           </p:cNvPr>
@@ -11682,7 +11690,7 @@
     </p:spTree>
     <p:extLst>
       <p:ext uri="{BB962C8B-B14F-4D97-AF65-F5344CB8AC3E}">
-        <p14:creationId xmlns:p14="http://schemas.microsoft.com/office/powerpoint/2010/main" val="708700232"/>
+        <p14:creationId xmlns:p14="http://schemas.microsoft.com/office/powerpoint/2010/main" val="2099548118"/>
       </p:ext>
     </p:extLst>
   </p:cSld>
@@ -11837,7 +11845,7 @@
           <p:cNvPr id="23" name="">
             <a:extLst xmlns:a="http://schemas.openxmlformats.org/drawingml/2006/main">
               <a:ext uri="{FF2B5EF4-FFF2-40B4-BE49-F238E27FC236}">
-                <a16:creationId xmlns:a16="http://schemas.microsoft.com/office/drawing/2014/main" id="{6941BBC2-E022-43FD-8EB2-A5B7FB7D3FB1}"/>
+                <a16:creationId xmlns:a16="http://schemas.microsoft.com/office/drawing/2014/main" id="{B82E3A97-E853-4408-B7DE-50D30AB282E4}"/>
               </a:ext>
             </a:extLst>
           </p:cNvPr>
@@ -11869,7 +11877,7 @@
           <p:cNvPr id="2" name="">
             <a:extLst xmlns:a="http://schemas.openxmlformats.org/drawingml/2006/main">
               <a:ext uri="{FF2B5EF4-FFF2-40B4-BE49-F238E27FC236}">
-                <a16:creationId xmlns:a16="http://schemas.microsoft.com/office/drawing/2014/main" id="{8A835246-507F-48FB-B14A-CCE8DE0F786E}"/>
+                <a16:creationId xmlns:a16="http://schemas.microsoft.com/office/drawing/2014/main" id="{079F4140-B518-4C44-B0C9-F503487880A4}"/>
               </a:ext>
             </a:extLst>
           </p:cNvPr>
@@ -11926,7 +11934,7 @@
           <p:cNvPr id="3" name="">
             <a:extLst xmlns:a="http://schemas.openxmlformats.org/drawingml/2006/main">
               <a:ext uri="{FF2B5EF4-FFF2-40B4-BE49-F238E27FC236}">
-                <a16:creationId xmlns:a16="http://schemas.microsoft.com/office/drawing/2014/main" id="{56DA32FF-CF3D-46D3-9DF7-E5B7CE630982}"/>
+                <a16:creationId xmlns:a16="http://schemas.microsoft.com/office/drawing/2014/main" id="{9379CDB7-C265-48A5-8783-62DEC3DE02E4}"/>
               </a:ext>
             </a:extLst>
           </p:cNvPr>
@@ -11958,7 +11966,7 @@
           <p:cNvPr id="4" name="">
             <a:extLst xmlns:a="http://schemas.openxmlformats.org/drawingml/2006/main">
               <a:ext uri="{FF2B5EF4-FFF2-40B4-BE49-F238E27FC236}">
-                <a16:creationId xmlns:a16="http://schemas.microsoft.com/office/drawing/2014/main" id="{5EE450C6-5920-4A6C-BFF4-5D0F59718E00}"/>
+                <a16:creationId xmlns:a16="http://schemas.microsoft.com/office/drawing/2014/main" id="{D91A2849-946B-41C4-AF4A-60A6B64B9975}"/>
               </a:ext>
             </a:extLst>
           </p:cNvPr>
@@ -12015,7 +12023,7 @@
           <p:cNvPr id="5" name="">
             <a:extLst xmlns:a="http://schemas.openxmlformats.org/drawingml/2006/main">
               <a:ext uri="{FF2B5EF4-FFF2-40B4-BE49-F238E27FC236}">
-                <a16:creationId xmlns:a16="http://schemas.microsoft.com/office/drawing/2014/main" id="{E8E3505D-EA8A-487F-8041-9E4EDF1A2FE1}"/>
+                <a16:creationId xmlns:a16="http://schemas.microsoft.com/office/drawing/2014/main" id="{974962AE-2339-4A92-838B-D62A89385368}"/>
               </a:ext>
             </a:extLst>
           </p:cNvPr>
@@ -12072,7 +12080,7 @@
           <p:cNvPr id="6" name="">
             <a:extLst xmlns:a="http://schemas.openxmlformats.org/drawingml/2006/main">
               <a:ext uri="{FF2B5EF4-FFF2-40B4-BE49-F238E27FC236}">
-                <a16:creationId xmlns:a16="http://schemas.microsoft.com/office/drawing/2014/main" id="{47524C15-0BD3-40B0-91F2-6A58342A58EA}"/>
+                <a16:creationId xmlns:a16="http://schemas.microsoft.com/office/drawing/2014/main" id="{A6D18F0D-FA62-4F7E-A0BA-EEE6CE56B586}"/>
               </a:ext>
             </a:extLst>
           </p:cNvPr>
@@ -12129,7 +12137,7 @@
           <p:cNvPr id="7" name="">
             <a:extLst xmlns:a="http://schemas.openxmlformats.org/drawingml/2006/main">
               <a:ext uri="{FF2B5EF4-FFF2-40B4-BE49-F238E27FC236}">
-                <a16:creationId xmlns:a16="http://schemas.microsoft.com/office/drawing/2014/main" id="{81C9D091-F2D6-400D-87FE-D106A8E6252A}"/>
+                <a16:creationId xmlns:a16="http://schemas.microsoft.com/office/drawing/2014/main" id="{FFFC7D06-89F1-48F8-B094-14F6CB96DD88}"/>
               </a:ext>
             </a:extLst>
           </p:cNvPr>
@@ -12161,7 +12169,7 @@
           <p:cNvPr id="8" name="">
             <a:extLst xmlns:a="http://schemas.openxmlformats.org/drawingml/2006/main">
               <a:ext uri="{FF2B5EF4-FFF2-40B4-BE49-F238E27FC236}">
-                <a16:creationId xmlns:a16="http://schemas.microsoft.com/office/drawing/2014/main" id="{E5932F6A-EE46-425C-8B24-E896B73D367E}"/>
+                <a16:creationId xmlns:a16="http://schemas.microsoft.com/office/drawing/2014/main" id="{2E653438-0353-46C6-89A7-80278439011D}"/>
               </a:ext>
             </a:extLst>
           </p:cNvPr>
@@ -12218,7 +12226,7 @@
           <p:cNvPr id="9" name="">
             <a:extLst xmlns:a="http://schemas.openxmlformats.org/drawingml/2006/main">
               <a:ext uri="{FF2B5EF4-FFF2-40B4-BE49-F238E27FC236}">
-                <a16:creationId xmlns:a16="http://schemas.microsoft.com/office/drawing/2014/main" id="{5AF60EA2-4639-4507-8F7B-9831AC6E0DBD}"/>
+                <a16:creationId xmlns:a16="http://schemas.microsoft.com/office/drawing/2014/main" id="{76043945-54E2-45B4-A324-43ADAE804491}"/>
               </a:ext>
             </a:extLst>
           </p:cNvPr>
@@ -12275,7 +12283,7 @@
           <p:cNvPr id="10" name="">
             <a:extLst xmlns:a="http://schemas.openxmlformats.org/drawingml/2006/main">
               <a:ext uri="{FF2B5EF4-FFF2-40B4-BE49-F238E27FC236}">
-                <a16:creationId xmlns:a16="http://schemas.microsoft.com/office/drawing/2014/main" id="{98443C98-61D6-4553-BA3A-D8034CD56C97}"/>
+                <a16:creationId xmlns:a16="http://schemas.microsoft.com/office/drawing/2014/main" id="{571BE555-C177-4849-AECC-8CB744A2661A}"/>
               </a:ext>
             </a:extLst>
           </p:cNvPr>
@@ -12309,7 +12317,7 @@
           <p:cNvPr id="11" name="">
             <a:extLst xmlns:a="http://schemas.openxmlformats.org/drawingml/2006/main">
               <a:ext uri="{FF2B5EF4-FFF2-40B4-BE49-F238E27FC236}">
-                <a16:creationId xmlns:a16="http://schemas.microsoft.com/office/drawing/2014/main" id="{44A604E7-5A3A-4F10-B309-13E827967E1D}"/>
+                <a16:creationId xmlns:a16="http://schemas.microsoft.com/office/drawing/2014/main" id="{62A25064-C9D4-452E-91D4-572EED8B3B8E}"/>
               </a:ext>
             </a:extLst>
           </p:cNvPr>
@@ -12341,7 +12349,7 @@
           <p:cNvPr id="12" name="">
             <a:extLst xmlns:a="http://schemas.openxmlformats.org/drawingml/2006/main">
               <a:ext uri="{FF2B5EF4-FFF2-40B4-BE49-F238E27FC236}">
-                <a16:creationId xmlns:a16="http://schemas.microsoft.com/office/drawing/2014/main" id="{E7017525-E606-4998-B35B-2BE02EF5E8D6}"/>
+                <a16:creationId xmlns:a16="http://schemas.microsoft.com/office/drawing/2014/main" id="{6C06AD26-30C8-4D60-AB8C-3FABE980EB76}"/>
               </a:ext>
             </a:extLst>
           </p:cNvPr>
@@ -12398,7 +12406,7 @@
           <p:cNvPr id="13" name="">
             <a:extLst xmlns:a="http://schemas.openxmlformats.org/drawingml/2006/main">
               <a:ext uri="{FF2B5EF4-FFF2-40B4-BE49-F238E27FC236}">
-                <a16:creationId xmlns:a16="http://schemas.microsoft.com/office/drawing/2014/main" id="{9B450AF0-6B98-4963-BA78-905DE4067742}"/>
+                <a16:creationId xmlns:a16="http://schemas.microsoft.com/office/drawing/2014/main" id="{445496AA-C849-4847-A57D-827DF2B2AEDC}"/>
               </a:ext>
             </a:extLst>
           </p:cNvPr>
@@ -12455,7 +12463,7 @@
           <p:cNvPr id="14" name="">
             <a:extLst xmlns:a="http://schemas.openxmlformats.org/drawingml/2006/main">
               <a:ext uri="{FF2B5EF4-FFF2-40B4-BE49-F238E27FC236}">
-                <a16:creationId xmlns:a16="http://schemas.microsoft.com/office/drawing/2014/main" id="{3D5397E0-A7ED-46F1-8E8E-E8A96FA5270C}"/>
+                <a16:creationId xmlns:a16="http://schemas.microsoft.com/office/drawing/2014/main" id="{37F0217F-AF42-463B-9A60-F8CD37658E79}"/>
               </a:ext>
             </a:extLst>
           </p:cNvPr>
@@ -12489,7 +12497,7 @@
           <p:cNvPr id="15" name="">
             <a:extLst xmlns:a="http://schemas.openxmlformats.org/drawingml/2006/main">
               <a:ext uri="{FF2B5EF4-FFF2-40B4-BE49-F238E27FC236}">
-                <a16:creationId xmlns:a16="http://schemas.microsoft.com/office/drawing/2014/main" id="{3E135C33-8B72-45B0-A6F8-BDD84FF008D0}"/>
+                <a16:creationId xmlns:a16="http://schemas.microsoft.com/office/drawing/2014/main" id="{09BCCADA-FEC9-4CD2-BBB3-06558E4034D8}"/>
               </a:ext>
             </a:extLst>
           </p:cNvPr>
@@ -12521,7 +12529,7 @@
           <p:cNvPr id="16" name="">
             <a:extLst xmlns:a="http://schemas.openxmlformats.org/drawingml/2006/main">
               <a:ext uri="{FF2B5EF4-FFF2-40B4-BE49-F238E27FC236}">
-                <a16:creationId xmlns:a16="http://schemas.microsoft.com/office/drawing/2014/main" id="{B715C807-DB6E-408D-AA96-888CB8F20289}"/>
+                <a16:creationId xmlns:a16="http://schemas.microsoft.com/office/drawing/2014/main" id="{CC4CE4E2-8C48-429D-987B-B1493BD2720C}"/>
               </a:ext>
             </a:extLst>
           </p:cNvPr>
@@ -12578,7 +12586,7 @@
           <p:cNvPr id="17" name="">
             <a:extLst xmlns:a="http://schemas.openxmlformats.org/drawingml/2006/main">
               <a:ext uri="{FF2B5EF4-FFF2-40B4-BE49-F238E27FC236}">
-                <a16:creationId xmlns:a16="http://schemas.microsoft.com/office/drawing/2014/main" id="{F6BD9B95-B36F-4E43-8BDF-1BFC3CF68DFF}"/>
+                <a16:creationId xmlns:a16="http://schemas.microsoft.com/office/drawing/2014/main" id="{5C19BA07-23BF-4F2D-84A7-6D71FB113C3C}"/>
               </a:ext>
             </a:extLst>
           </p:cNvPr>
@@ -12635,7 +12643,7 @@
           <p:cNvPr id="18" name="">
             <a:extLst xmlns:a="http://schemas.openxmlformats.org/drawingml/2006/main">
               <a:ext uri="{FF2B5EF4-FFF2-40B4-BE49-F238E27FC236}">
-                <a16:creationId xmlns:a16="http://schemas.microsoft.com/office/drawing/2014/main" id="{45BBFCCF-977B-495E-AD80-A86865F19EC4}"/>
+                <a16:creationId xmlns:a16="http://schemas.microsoft.com/office/drawing/2014/main" id="{8BAA8CA1-ACF6-42B7-84F2-D41AE18FE1CE}"/>
               </a:ext>
             </a:extLst>
           </p:cNvPr>
@@ -12669,7 +12677,7 @@
           <p:cNvPr id="19" name="">
             <a:extLst xmlns:a="http://schemas.openxmlformats.org/drawingml/2006/main">
               <a:ext uri="{FF2B5EF4-FFF2-40B4-BE49-F238E27FC236}">
-                <a16:creationId xmlns:a16="http://schemas.microsoft.com/office/drawing/2014/main" id="{9B2C8FC2-FB5C-41BE-8D67-AE9525AF80B3}"/>
+                <a16:creationId xmlns:a16="http://schemas.microsoft.com/office/drawing/2014/main" id="{B0BFE811-096B-4005-96C9-253CD78A8EDB}"/>
               </a:ext>
             </a:extLst>
           </p:cNvPr>
@@ -12701,7 +12709,7 @@
           <p:cNvPr id="20" name="">
             <a:extLst xmlns:a="http://schemas.openxmlformats.org/drawingml/2006/main">
               <a:ext uri="{FF2B5EF4-FFF2-40B4-BE49-F238E27FC236}">
-                <a16:creationId xmlns:a16="http://schemas.microsoft.com/office/drawing/2014/main" id="{4DDCC70F-AEB7-4A49-827B-796203092133}"/>
+                <a16:creationId xmlns:a16="http://schemas.microsoft.com/office/drawing/2014/main" id="{2AE41721-03B7-425A-8CF7-8591362F1DCB}"/>
               </a:ext>
             </a:extLst>
           </p:cNvPr>
@@ -12758,7 +12766,7 @@
           <p:cNvPr id="21" name="">
             <a:extLst xmlns:a="http://schemas.openxmlformats.org/drawingml/2006/main">
               <a:ext uri="{FF2B5EF4-FFF2-40B4-BE49-F238E27FC236}">
-                <a16:creationId xmlns:a16="http://schemas.microsoft.com/office/drawing/2014/main" id="{0E8AF900-9175-4348-8FAE-1EA258207CD5}"/>
+                <a16:creationId xmlns:a16="http://schemas.microsoft.com/office/drawing/2014/main" id="{E4DF3F10-96D6-4BED-8975-8C94FB652AD1}"/>
               </a:ext>
             </a:extLst>
           </p:cNvPr>
@@ -12815,7 +12823,7 @@
           <p:cNvPr id="22" name="">
             <a:extLst xmlns:a="http://schemas.openxmlformats.org/drawingml/2006/main">
               <a:ext uri="{FF2B5EF4-FFF2-40B4-BE49-F238E27FC236}">
-                <a16:creationId xmlns:a16="http://schemas.microsoft.com/office/drawing/2014/main" id="{2C02B512-27E8-4ABD-B37D-EB586413A9AE}"/>
+                <a16:creationId xmlns:a16="http://schemas.microsoft.com/office/drawing/2014/main" id="{B1C597AD-37D5-4965-BDB5-C8F19C3366D6}"/>
               </a:ext>
             </a:extLst>
           </p:cNvPr>
@@ -12870,7 +12878,7 @@
     </p:spTree>
     <p:extLst>
       <p:ext uri="{BB962C8B-B14F-4D97-AF65-F5344CB8AC3E}">
-        <p14:creationId xmlns:p14="http://schemas.microsoft.com/office/powerpoint/2010/main" val="1118883673"/>
+        <p14:creationId xmlns:p14="http://schemas.microsoft.com/office/powerpoint/2010/main" val="263555059"/>
       </p:ext>
     </p:extLst>
   </p:cSld>
@@ -13071,7 +13079,7 @@
           <p:cNvPr id="22" name="">
             <a:extLst xmlns:a="http://schemas.openxmlformats.org/drawingml/2006/main">
               <a:ext uri="{FF2B5EF4-FFF2-40B4-BE49-F238E27FC236}">
-                <a16:creationId xmlns:a16="http://schemas.microsoft.com/office/drawing/2014/main" id="{E1E66349-F997-4283-BB13-822E86651F5F}"/>
+                <a16:creationId xmlns:a16="http://schemas.microsoft.com/office/drawing/2014/main" id="{2D18AEC4-2322-4673-858A-DC9516E30804}"/>
               </a:ext>
             </a:extLst>
           </p:cNvPr>
@@ -13103,7 +13111,7 @@
           <p:cNvPr id="2" name="">
             <a:extLst xmlns:a="http://schemas.openxmlformats.org/drawingml/2006/main">
               <a:ext uri="{FF2B5EF4-FFF2-40B4-BE49-F238E27FC236}">
-                <a16:creationId xmlns:a16="http://schemas.microsoft.com/office/drawing/2014/main" id="{AEB6AA38-B9D6-432C-90D0-FAF2E91AD481}"/>
+                <a16:creationId xmlns:a16="http://schemas.microsoft.com/office/drawing/2014/main" id="{1418FD74-66D8-4A22-BDA1-CE14EB7FE808}"/>
               </a:ext>
             </a:extLst>
           </p:cNvPr>
@@ -13160,7 +13168,7 @@
           <p:cNvPr id="3" name="">
             <a:extLst xmlns:a="http://schemas.openxmlformats.org/drawingml/2006/main">
               <a:ext uri="{FF2B5EF4-FFF2-40B4-BE49-F238E27FC236}">
-                <a16:creationId xmlns:a16="http://schemas.microsoft.com/office/drawing/2014/main" id="{2052725C-99E8-46D5-A8F0-307BE1CD578F}"/>
+                <a16:creationId xmlns:a16="http://schemas.microsoft.com/office/drawing/2014/main" id="{877D9D25-D64D-4C4A-801B-CFFE68151D5E}"/>
               </a:ext>
             </a:extLst>
           </p:cNvPr>
@@ -13192,7 +13200,7 @@
           <p:cNvPr id="4" name="">
             <a:extLst xmlns:a="http://schemas.openxmlformats.org/drawingml/2006/main">
               <a:ext uri="{FF2B5EF4-FFF2-40B4-BE49-F238E27FC236}">
-                <a16:creationId xmlns:a16="http://schemas.microsoft.com/office/drawing/2014/main" id="{98069D46-C4EC-4B0D-A3EA-96FF5DEC7264}"/>
+                <a16:creationId xmlns:a16="http://schemas.microsoft.com/office/drawing/2014/main" id="{74016E83-30EB-45A4-82DE-4A94DA28BD6B}"/>
               </a:ext>
             </a:extLst>
           </p:cNvPr>
@@ -13249,7 +13257,7 @@
           <p:cNvPr id="5" name="">
             <a:extLst xmlns:a="http://schemas.openxmlformats.org/drawingml/2006/main">
               <a:ext uri="{FF2B5EF4-FFF2-40B4-BE49-F238E27FC236}">
-                <a16:creationId xmlns:a16="http://schemas.microsoft.com/office/drawing/2014/main" id="{E15C02D2-D95D-4114-A558-A95F6890FB94}"/>
+                <a16:creationId xmlns:a16="http://schemas.microsoft.com/office/drawing/2014/main" id="{A6D20EF8-2C45-4DC4-BA0F-CB1A2859C338}"/>
               </a:ext>
             </a:extLst>
           </p:cNvPr>
@@ -13306,7 +13314,7 @@
           <p:cNvPr id="6" name="">
             <a:extLst xmlns:a="http://schemas.openxmlformats.org/drawingml/2006/main">
               <a:ext uri="{FF2B5EF4-FFF2-40B4-BE49-F238E27FC236}">
-                <a16:creationId xmlns:a16="http://schemas.microsoft.com/office/drawing/2014/main" id="{449FE919-8020-47ED-B0B5-F0C49279D180}"/>
+                <a16:creationId xmlns:a16="http://schemas.microsoft.com/office/drawing/2014/main" id="{6BAE3CEF-8DF8-4A14-89C9-6EF8CB990942}"/>
               </a:ext>
             </a:extLst>
           </p:cNvPr>
@@ -13363,7 +13371,7 @@
           <p:cNvPr id="7" name="">
             <a:extLst xmlns:a="http://schemas.openxmlformats.org/drawingml/2006/main">
               <a:ext uri="{FF2B5EF4-FFF2-40B4-BE49-F238E27FC236}">
-                <a16:creationId xmlns:a16="http://schemas.microsoft.com/office/drawing/2014/main" id="{1D081E83-E00B-454F-810B-7346353F7181}"/>
+                <a16:creationId xmlns:a16="http://schemas.microsoft.com/office/drawing/2014/main" id="{7C6C0494-862E-4B17-8E9E-5701591B905F}"/>
               </a:ext>
             </a:extLst>
           </p:cNvPr>
@@ -13395,7 +13403,7 @@
           <p:cNvPr id="8" name="">
             <a:extLst xmlns:a="http://schemas.openxmlformats.org/drawingml/2006/main">
               <a:ext uri="{FF2B5EF4-FFF2-40B4-BE49-F238E27FC236}">
-                <a16:creationId xmlns:a16="http://schemas.microsoft.com/office/drawing/2014/main" id="{1551ABA3-2F65-4B6B-BDEC-03E1CF1ECB6E}"/>
+                <a16:creationId xmlns:a16="http://schemas.microsoft.com/office/drawing/2014/main" id="{E9A482B5-D805-4CC5-A2F2-45511DD30AB5}"/>
               </a:ext>
             </a:extLst>
           </p:cNvPr>
@@ -13452,7 +13460,7 @@
           <p:cNvPr id="9" name="">
             <a:extLst xmlns:a="http://schemas.openxmlformats.org/drawingml/2006/main">
               <a:ext uri="{FF2B5EF4-FFF2-40B4-BE49-F238E27FC236}">
-                <a16:creationId xmlns:a16="http://schemas.microsoft.com/office/drawing/2014/main" id="{3B4C95CE-6C3A-4D8C-915B-1C91A0B3A350}"/>
+                <a16:creationId xmlns:a16="http://schemas.microsoft.com/office/drawing/2014/main" id="{14DB6E7A-BC1A-4F34-8901-8490C961BF04}"/>
               </a:ext>
             </a:extLst>
           </p:cNvPr>
@@ -13509,7 +13517,7 @@
           <p:cNvPr id="10" name="">
             <a:extLst xmlns:a="http://schemas.openxmlformats.org/drawingml/2006/main">
               <a:ext uri="{FF2B5EF4-FFF2-40B4-BE49-F238E27FC236}">
-                <a16:creationId xmlns:a16="http://schemas.microsoft.com/office/drawing/2014/main" id="{A2265A5E-FF7C-4F7B-8129-F0FC6886799C}"/>
+                <a16:creationId xmlns:a16="http://schemas.microsoft.com/office/drawing/2014/main" id="{D113965D-F0E7-46E8-8B6C-45BAA145D0BF}"/>
               </a:ext>
             </a:extLst>
           </p:cNvPr>
@@ -13543,7 +13551,7 @@
           <p:cNvPr id="11" name="">
             <a:extLst xmlns:a="http://schemas.openxmlformats.org/drawingml/2006/main">
               <a:ext uri="{FF2B5EF4-FFF2-40B4-BE49-F238E27FC236}">
-                <a16:creationId xmlns:a16="http://schemas.microsoft.com/office/drawing/2014/main" id="{E245E39C-B4A5-4CD7-B98E-8484A5937301}"/>
+                <a16:creationId xmlns:a16="http://schemas.microsoft.com/office/drawing/2014/main" id="{60E176CD-65C1-471A-A0FE-68B017B60083}"/>
               </a:ext>
             </a:extLst>
           </p:cNvPr>
@@ -13575,7 +13583,7 @@
           <p:cNvPr id="12" name="">
             <a:extLst xmlns:a="http://schemas.openxmlformats.org/drawingml/2006/main">
               <a:ext uri="{FF2B5EF4-FFF2-40B4-BE49-F238E27FC236}">
-                <a16:creationId xmlns:a16="http://schemas.microsoft.com/office/drawing/2014/main" id="{5EF4DABD-2761-4D97-9FA4-226554120F2E}"/>
+                <a16:creationId xmlns:a16="http://schemas.microsoft.com/office/drawing/2014/main" id="{022D0022-C665-469D-88BE-318532CCBEEA}"/>
               </a:ext>
             </a:extLst>
           </p:cNvPr>
@@ -13632,7 +13640,7 @@
           <p:cNvPr id="13" name="">
             <a:extLst xmlns:a="http://schemas.openxmlformats.org/drawingml/2006/main">
               <a:ext uri="{FF2B5EF4-FFF2-40B4-BE49-F238E27FC236}">
-                <a16:creationId xmlns:a16="http://schemas.microsoft.com/office/drawing/2014/main" id="{A05C229F-C3DF-49FE-98BE-713C7CB0FBD5}"/>
+                <a16:creationId xmlns:a16="http://schemas.microsoft.com/office/drawing/2014/main" id="{30922380-DCB4-4DF3-AD92-9E43F0490281}"/>
               </a:ext>
             </a:extLst>
           </p:cNvPr>
@@ -13689,7 +13697,7 @@
           <p:cNvPr id="14" name="">
             <a:extLst xmlns:a="http://schemas.openxmlformats.org/drawingml/2006/main">
               <a:ext uri="{FF2B5EF4-FFF2-40B4-BE49-F238E27FC236}">
-                <a16:creationId xmlns:a16="http://schemas.microsoft.com/office/drawing/2014/main" id="{F27B3912-BF53-4327-9A96-348C74594E7D}"/>
+                <a16:creationId xmlns:a16="http://schemas.microsoft.com/office/drawing/2014/main" id="{4CFF5488-61B6-43DF-AD79-B4B7C60ECC51}"/>
               </a:ext>
             </a:extLst>
           </p:cNvPr>
@@ -13723,7 +13731,7 @@
           <p:cNvPr id="15" name="">
             <a:extLst xmlns:a="http://schemas.openxmlformats.org/drawingml/2006/main">
               <a:ext uri="{FF2B5EF4-FFF2-40B4-BE49-F238E27FC236}">
-                <a16:creationId xmlns:a16="http://schemas.microsoft.com/office/drawing/2014/main" id="{0B2507BE-92EA-4F96-80FE-F3C5521EC157}"/>
+                <a16:creationId xmlns:a16="http://schemas.microsoft.com/office/drawing/2014/main" id="{17866D18-251F-4799-B69D-D138DE42359A}"/>
               </a:ext>
             </a:extLst>
           </p:cNvPr>
@@ -13755,7 +13763,7 @@
           <p:cNvPr id="16" name="">
             <a:extLst xmlns:a="http://schemas.openxmlformats.org/drawingml/2006/main">
               <a:ext uri="{FF2B5EF4-FFF2-40B4-BE49-F238E27FC236}">
-                <a16:creationId xmlns:a16="http://schemas.microsoft.com/office/drawing/2014/main" id="{8F709E88-C087-4110-A498-330EC3FC3512}"/>
+                <a16:creationId xmlns:a16="http://schemas.microsoft.com/office/drawing/2014/main" id="{3FFA5B7B-33BE-43E2-A1F0-8EC7B9558E0F}"/>
               </a:ext>
             </a:extLst>
           </p:cNvPr>
@@ -13812,7 +13820,7 @@
           <p:cNvPr id="17" name="">
             <a:extLst xmlns:a="http://schemas.openxmlformats.org/drawingml/2006/main">
               <a:ext uri="{FF2B5EF4-FFF2-40B4-BE49-F238E27FC236}">
-                <a16:creationId xmlns:a16="http://schemas.microsoft.com/office/drawing/2014/main" id="{72147307-B886-40FB-9B31-AEF38EE05411}"/>
+                <a16:creationId xmlns:a16="http://schemas.microsoft.com/office/drawing/2014/main" id="{9F3A10DA-DE6A-4E9C-9234-85093185BC61}"/>
               </a:ext>
             </a:extLst>
           </p:cNvPr>
@@ -13869,7 +13877,7 @@
           <p:cNvPr id="18" name="">
             <a:extLst xmlns:a="http://schemas.openxmlformats.org/drawingml/2006/main">
               <a:ext uri="{FF2B5EF4-FFF2-40B4-BE49-F238E27FC236}">
-                <a16:creationId xmlns:a16="http://schemas.microsoft.com/office/drawing/2014/main" id="{0856E2D2-EC46-433F-B055-765EC923581A}"/>
+                <a16:creationId xmlns:a16="http://schemas.microsoft.com/office/drawing/2014/main" id="{7AA29C0F-71A3-49ED-B6A6-0A0BB65E5A11}"/>
               </a:ext>
             </a:extLst>
           </p:cNvPr>
@@ -13903,7 +13911,7 @@
           <p:cNvPr id="19" name="">
             <a:extLst xmlns:a="http://schemas.openxmlformats.org/drawingml/2006/main">
               <a:ext uri="{FF2B5EF4-FFF2-40B4-BE49-F238E27FC236}">
-                <a16:creationId xmlns:a16="http://schemas.microsoft.com/office/drawing/2014/main" id="{17B63B42-8FF1-470F-B592-CFAFC6A9E771}"/>
+                <a16:creationId xmlns:a16="http://schemas.microsoft.com/office/drawing/2014/main" id="{100D8A37-32A3-4EBF-9244-17E188B9B7E5}"/>
               </a:ext>
             </a:extLst>
           </p:cNvPr>
@@ -13935,7 +13943,7 @@
           <p:cNvPr id="20" name="">
             <a:extLst xmlns:a="http://schemas.openxmlformats.org/drawingml/2006/main">
               <a:ext uri="{FF2B5EF4-FFF2-40B4-BE49-F238E27FC236}">
-                <a16:creationId xmlns:a16="http://schemas.microsoft.com/office/drawing/2014/main" id="{D1A33F6C-2C6D-479E-B895-9475560DF113}"/>
+                <a16:creationId xmlns:a16="http://schemas.microsoft.com/office/drawing/2014/main" id="{94B66A0E-583F-4250-A0E1-047549180D8C}"/>
               </a:ext>
             </a:extLst>
           </p:cNvPr>
@@ -13992,7 +14000,7 @@
           <p:cNvPr id="21" name="">
             <a:extLst xmlns:a="http://schemas.openxmlformats.org/drawingml/2006/main">
               <a:ext uri="{FF2B5EF4-FFF2-40B4-BE49-F238E27FC236}">
-                <a16:creationId xmlns:a16="http://schemas.microsoft.com/office/drawing/2014/main" id="{AE26A58C-BDB7-4696-ACAC-D383A27E2B0F}"/>
+                <a16:creationId xmlns:a16="http://schemas.microsoft.com/office/drawing/2014/main" id="{823882EE-076B-40EF-9A5E-EBD2EE9C33D5}"/>
               </a:ext>
             </a:extLst>
           </p:cNvPr>
@@ -14047,7 +14055,7 @@
     </p:spTree>
     <p:extLst>
       <p:ext uri="{BB962C8B-B14F-4D97-AF65-F5344CB8AC3E}">
-        <p14:creationId xmlns:p14="http://schemas.microsoft.com/office/powerpoint/2010/main" val="898631097"/>
+        <p14:creationId xmlns:p14="http://schemas.microsoft.com/office/powerpoint/2010/main" val="1214191221"/>
       </p:ext>
     </p:extLst>
   </p:cSld>
